--- a/projects/selfintroduction/.selfintroduction_pptx.render.pptx
+++ b/projects/selfintroduction/.selfintroduction_pptx.render.pptx
@@ -1,6 +1,6 @@
 
 <file path=ppt/presentation.xml><?xml version="1.0" encoding="utf-8"?>
-<p:presentation xmlns:a="http://schemas.openxmlformats.org/drawingml/2006/main" xmlns:p="http://schemas.openxmlformats.org/presentationml/2006/main" xmlns:r="http://schemas.openxmlformats.org/officeDocument/2006/relationships" autoCompressPictures="0">
+<p:presentation xmlns:a="http://schemas.openxmlformats.org/drawingml/2006/main" xmlns:p="http://schemas.openxmlformats.org/presentationml/2006/main" xmlns:r="http://schemas.openxmlformats.org/officeDocument/2006/relationships" autoCompressPictures="0" saveSubsetFonts="1">
   <p:sldMasterIdLst>
     <p:sldMasterId id="2147483648" r:id="rId1"/>
   </p:sldMasterIdLst>
@@ -12,7 +12,7 @@
     <p:sldId id="260" r:id="rId6"/>
     <p:sldId id="261" r:id="rId7"/>
   </p:sldIdLst>
-  <p:sldSz cx="12192000" cy="6858000"/>
+  <p:sldSz cx="9144000" cy="5143500" type="screen16x9"/>
   <p:notesSz cx="6858000" cy="9144000"/>
   <p:defaultTextStyle>
     <a:defPPr>
@@ -109,6 +109,22 @@
       </a:defRPr>
     </a:lvl9pPr>
   </p:defaultTextStyle>
+  <p:extLst>
+    <p:ext uri="{EFAFB233-063F-42B5-8137-9DF3F51BA10A}">
+      <p15:sldGuideLst xmlns:p15="http://schemas.microsoft.com/office/powerpoint/2012/main">
+        <p15:guide id="1" orient="horz" pos="1620" userDrawn="1">
+          <p15:clr>
+            <a:srgbClr val="A4A3A4"/>
+          </p15:clr>
+        </p15:guide>
+        <p15:guide id="2" pos="2880" userDrawn="1">
+          <p15:clr>
+            <a:srgbClr val="A4A3A4"/>
+          </p15:clr>
+        </p15:guide>
+      </p15:sldGuideLst>
+    </p:ext>
+  </p:extLst>
 </p:presentation>
 </file>
 
@@ -141,25 +157,18 @@
         </p:nvSpPr>
         <p:spPr>
           <a:xfrm>
-            <a:off x="2417779" y="802298"/>
-            <a:ext cx="8637073" cy="2541431"/>
+            <a:off x="685800" y="1597819"/>
+            <a:ext cx="7772400" cy="1102519"/>
           </a:xfrm>
         </p:spPr>
         <p:txBody>
-          <a:bodyPr bIns="0" anchor="b">
-            <a:normAutofit/>
-          </a:bodyPr>
-          <a:lstStyle>
-            <a:lvl1pPr algn="l">
-              <a:defRPr sz="6600"/>
-            </a:lvl1pPr>
-          </a:lstStyle>
-          <a:p>
-            <a:r>
-              <a:rPr lang="ja-JP" altLang="en-US"/>
-              <a:t>マスター タイトルの書式設定</a:t>
-            </a:r>
-            <a:endParaRPr lang="en-US" dirty="0"/>
+          <a:bodyPr/>
+          <a:lstStyle/>
+          <a:p>
+            <a:r>
+              <a:rPr lang="en-US"/>
+              <a:t>Click to edit Master title style</a:t>
+            </a:r>
           </a:p>
         </p:txBody>
       </p:sp>
@@ -175,62 +184,109 @@
         </p:nvSpPr>
         <p:spPr>
           <a:xfrm>
-            <a:off x="2417780" y="3531204"/>
-            <a:ext cx="8637072" cy="977621"/>
+            <a:off x="1371600" y="2914650"/>
+            <a:ext cx="6400800" cy="1314450"/>
           </a:xfrm>
         </p:spPr>
         <p:txBody>
-          <a:bodyPr tIns="91440" bIns="91440">
-            <a:normAutofit/>
-          </a:bodyPr>
+          <a:bodyPr/>
           <a:lstStyle>
-            <a:lvl1pPr marL="0" indent="0" algn="l">
-              <a:buNone/>
-              <a:defRPr sz="1800" b="0" cap="all" baseline="0">
+            <a:lvl1pPr marL="0" indent="0" algn="ctr">
+              <a:buNone/>
+              <a:defRPr>
                 <a:solidFill>
-                  <a:schemeClr val="tx1"/>
+                  <a:schemeClr val="tx1">
+                    <a:tint val="75000"/>
+                  </a:schemeClr>
                 </a:solidFill>
               </a:defRPr>
             </a:lvl1pPr>
-            <a:lvl2pPr marL="457200" indent="0" algn="ctr">
-              <a:buNone/>
-              <a:defRPr sz="1800"/>
+            <a:lvl2pPr marL="342900" indent="0" algn="ctr">
+              <a:buNone/>
+              <a:defRPr>
+                <a:solidFill>
+                  <a:schemeClr val="tx1">
+                    <a:tint val="75000"/>
+                  </a:schemeClr>
+                </a:solidFill>
+              </a:defRPr>
             </a:lvl2pPr>
-            <a:lvl3pPr marL="914400" indent="0" algn="ctr">
-              <a:buNone/>
-              <a:defRPr sz="1800"/>
+            <a:lvl3pPr marL="685800" indent="0" algn="ctr">
+              <a:buNone/>
+              <a:defRPr>
+                <a:solidFill>
+                  <a:schemeClr val="tx1">
+                    <a:tint val="75000"/>
+                  </a:schemeClr>
+                </a:solidFill>
+              </a:defRPr>
             </a:lvl3pPr>
-            <a:lvl4pPr marL="1371600" indent="0" algn="ctr">
-              <a:buNone/>
-              <a:defRPr sz="1600"/>
+            <a:lvl4pPr marL="1028700" indent="0" algn="ctr">
+              <a:buNone/>
+              <a:defRPr>
+                <a:solidFill>
+                  <a:schemeClr val="tx1">
+                    <a:tint val="75000"/>
+                  </a:schemeClr>
+                </a:solidFill>
+              </a:defRPr>
             </a:lvl4pPr>
-            <a:lvl5pPr marL="1828800" indent="0" algn="ctr">
-              <a:buNone/>
-              <a:defRPr sz="1600"/>
+            <a:lvl5pPr marL="1371600" indent="0" algn="ctr">
+              <a:buNone/>
+              <a:defRPr>
+                <a:solidFill>
+                  <a:schemeClr val="tx1">
+                    <a:tint val="75000"/>
+                  </a:schemeClr>
+                </a:solidFill>
+              </a:defRPr>
             </a:lvl5pPr>
-            <a:lvl6pPr marL="2286000" indent="0" algn="ctr">
-              <a:buNone/>
-              <a:defRPr sz="1600"/>
+            <a:lvl6pPr marL="1714500" indent="0" algn="ctr">
+              <a:buNone/>
+              <a:defRPr>
+                <a:solidFill>
+                  <a:schemeClr val="tx1">
+                    <a:tint val="75000"/>
+                  </a:schemeClr>
+                </a:solidFill>
+              </a:defRPr>
             </a:lvl6pPr>
-            <a:lvl7pPr marL="2743200" indent="0" algn="ctr">
-              <a:buNone/>
-              <a:defRPr sz="1600"/>
+            <a:lvl7pPr marL="2057400" indent="0" algn="ctr">
+              <a:buNone/>
+              <a:defRPr>
+                <a:solidFill>
+                  <a:schemeClr val="tx1">
+                    <a:tint val="75000"/>
+                  </a:schemeClr>
+                </a:solidFill>
+              </a:defRPr>
             </a:lvl7pPr>
-            <a:lvl8pPr marL="3200400" indent="0" algn="ctr">
-              <a:buNone/>
-              <a:defRPr sz="1600"/>
+            <a:lvl8pPr marL="2400300" indent="0" algn="ctr">
+              <a:buNone/>
+              <a:defRPr>
+                <a:solidFill>
+                  <a:schemeClr val="tx1">
+                    <a:tint val="75000"/>
+                  </a:schemeClr>
+                </a:solidFill>
+              </a:defRPr>
             </a:lvl8pPr>
-            <a:lvl9pPr marL="3657600" indent="0" algn="ctr">
-              <a:buNone/>
-              <a:defRPr sz="1600"/>
+            <a:lvl9pPr marL="2743200" indent="0" algn="ctr">
+              <a:buNone/>
+              <a:defRPr>
+                <a:solidFill>
+                  <a:schemeClr val="tx1">
+                    <a:tint val="75000"/>
+                  </a:schemeClr>
+                </a:solidFill>
+              </a:defRPr>
             </a:lvl9pPr>
           </a:lstStyle>
           <a:p>
             <a:r>
-              <a:rPr lang="ja-JP" altLang="en-US"/>
-              <a:t>マスター サブタイトルの書式設定</a:t>
-            </a:r>
-            <a:endParaRPr lang="en-US" dirty="0"/>
+              <a:rPr lang="en-US"/>
+              <a:t>Click to edit Master subtitle style</a:t>
+            </a:r>
           </a:p>
         </p:txBody>
       </p:sp>
@@ -249,11 +305,11 @@
           <a:bodyPr/>
           <a:lstStyle/>
           <a:p>
-            <a:fld id="{48A87A34-81AB-432B-8DAE-1953F412C126}" type="datetimeFigureOut">
-              <a:rPr lang="en-US" dirty="0"/>
-              <a:t>3/26/26</a:t>
+            <a:fld id="{241EB5C9-1307-BA42-ABA2-0BC069CD8E7F}" type="datetimeFigureOut">
+              <a:rPr lang="en-US" smtClean="0"/>
+              <a:t>1/2/22</a:t>
             </a:fld>
-            <a:endParaRPr lang="en-US" dirty="0"/>
+            <a:endParaRPr lang="en-US"/>
           </a:p>
         </p:txBody>
       </p:sp>
@@ -267,17 +323,12 @@
             <p:ph type="ftr" sz="quarter" idx="11"/>
           </p:nvPr>
         </p:nvSpPr>
-        <p:spPr>
-          <a:xfrm>
-            <a:off x="2416500" y="329307"/>
-            <a:ext cx="4973915" cy="309201"/>
-          </a:xfrm>
-        </p:spPr>
-        <p:txBody>
-          <a:bodyPr/>
-          <a:lstStyle/>
-          <a:p>
-            <a:endParaRPr lang="en-US" dirty="0"/>
+        <p:spPr/>
+        <p:txBody>
+          <a:bodyPr/>
+          <a:lstStyle/>
+          <a:p>
+            <a:endParaRPr lang="en-US"/>
           </a:p>
         </p:txBody>
       </p:sp>
@@ -291,56 +342,25 @@
             <p:ph type="sldNum" sz="quarter" idx="12"/>
           </p:nvPr>
         </p:nvSpPr>
-        <p:spPr>
-          <a:xfrm>
-            <a:off x="1437664" y="798973"/>
-            <a:ext cx="811019" cy="503578"/>
-          </a:xfrm>
-        </p:spPr>
-        <p:txBody>
-          <a:bodyPr/>
-          <a:lstStyle/>
-          <a:p>
-            <a:fld id="{6D22F896-40B5-4ADD-8801-0D06FADFA095}" type="slidenum">
-              <a:rPr lang="en-US" dirty="0"/>
+        <p:spPr/>
+        <p:txBody>
+          <a:bodyPr/>
+          <a:lstStyle/>
+          <a:p>
+            <a:fld id="{C5EF2332-01BF-834F-8236-50238282D533}" type="slidenum">
+              <a:rPr lang="en-US" smtClean="0"/>
               <a:t>‹#›</a:t>
             </a:fld>
-            <a:endParaRPr lang="en-US" dirty="0"/>
-          </a:p>
-        </p:txBody>
-      </p:sp>
-      <p:cxnSp>
-        <p:nvCxnSpPr>
-          <p:cNvPr id="15" name="Straight Connector 14"/>
-          <p:cNvCxnSpPr/>
-          <p:nvPr/>
-        </p:nvCxnSpPr>
-        <p:spPr>
-          <a:xfrm>
-            <a:off x="2417780" y="3528542"/>
-            <a:ext cx="8637072" cy="0"/>
-          </a:xfrm>
-          <a:prstGeom prst="line">
-            <a:avLst/>
-          </a:prstGeom>
-          <a:ln w="31750"/>
-        </p:spPr>
-        <p:style>
-          <a:lnRef idx="3">
-            <a:schemeClr val="accent1"/>
-          </a:lnRef>
-          <a:fillRef idx="0">
-            <a:schemeClr val="accent1"/>
-          </a:fillRef>
-          <a:effectRef idx="2">
-            <a:schemeClr val="accent1"/>
-          </a:effectRef>
-          <a:fontRef idx="minor">
-            <a:schemeClr val="tx1"/>
-          </a:fontRef>
-        </p:style>
-      </p:cxnSp>
+            <a:endParaRPr lang="en-US"/>
+          </a:p>
+        </p:txBody>
+      </p:sp>
     </p:spTree>
+    <p:extLst>
+      <p:ext uri="{BB962C8B-B14F-4D97-AF65-F5344CB8AC3E}">
+        <p14:creationId xmlns:p14="http://schemas.microsoft.com/office/powerpoint/2010/main" val="1444357513"/>
+      </p:ext>
+    </p:extLst>
   </p:cSld>
   <p:clrMapOvr>
     <a:masterClrMapping/>
@@ -350,7 +370,7 @@
 
 <file path=ppt/slideLayouts/slideLayout10.xml><?xml version="1.0" encoding="utf-8"?>
 <p:sldLayout xmlns:a="http://schemas.openxmlformats.org/drawingml/2006/main" xmlns:r="http://schemas.openxmlformats.org/officeDocument/2006/relationships" xmlns:p="http://schemas.openxmlformats.org/presentationml/2006/main" type="vertTx" preserve="1">
-  <p:cSld name="タイトルと縦書きテキスト">
+  <p:cSld name="Title and Vertical Text">
     <p:spTree>
       <p:nvGrpSpPr>
         <p:cNvPr id="1" name=""/>
@@ -381,10 +401,9 @@
           <a:lstStyle/>
           <a:p>
             <a:r>
-              <a:rPr lang="ja-JP" altLang="en-US"/>
-              <a:t>マスター タイトルの書式設定</a:t>
-            </a:r>
-            <a:endParaRPr lang="en-US" dirty="0"/>
+              <a:rPr lang="en-US"/>
+              <a:t>Click to edit Master title style</a:t>
+            </a:r>
           </a:p>
         </p:txBody>
       </p:sp>
@@ -405,70 +424,37 @@
           <a:p>
             <a:pPr lvl="0"/>
             <a:r>
-              <a:rPr lang="ja-JP" altLang="en-US"/>
-              <a:t>マスター テキストの書式設定</a:t>
+              <a:rPr lang="en-US"/>
+              <a:t>Click to edit Master text styles</a:t>
             </a:r>
           </a:p>
           <a:p>
             <a:pPr lvl="1"/>
             <a:r>
-              <a:rPr lang="ja-JP" altLang="en-US"/>
-              <a:t>第 </a:t>
-            </a:r>
-            <a:r>
-              <a:rPr lang="en-US" altLang="ja-JP"/>
-              <a:t>2 </a:t>
-            </a:r>
-            <a:r>
-              <a:rPr lang="ja-JP" altLang="en-US"/>
-              <a:t>レベル</a:t>
+              <a:rPr lang="en-US"/>
+              <a:t>Second level</a:t>
             </a:r>
           </a:p>
           <a:p>
             <a:pPr lvl="2"/>
             <a:r>
-              <a:rPr lang="ja-JP" altLang="en-US"/>
-              <a:t>第 </a:t>
-            </a:r>
-            <a:r>
-              <a:rPr lang="en-US" altLang="ja-JP"/>
-              <a:t>3 </a:t>
-            </a:r>
-            <a:r>
-              <a:rPr lang="ja-JP" altLang="en-US"/>
-              <a:t>レベル</a:t>
+              <a:rPr lang="en-US"/>
+              <a:t>Third level</a:t>
             </a:r>
           </a:p>
           <a:p>
             <a:pPr lvl="3"/>
             <a:r>
-              <a:rPr lang="ja-JP" altLang="en-US"/>
-              <a:t>第 </a:t>
-            </a:r>
-            <a:r>
-              <a:rPr lang="en-US" altLang="ja-JP"/>
-              <a:t>4 </a:t>
-            </a:r>
-            <a:r>
-              <a:rPr lang="ja-JP" altLang="en-US"/>
-              <a:t>レベル</a:t>
+              <a:rPr lang="en-US"/>
+              <a:t>Fourth level</a:t>
             </a:r>
           </a:p>
           <a:p>
             <a:pPr lvl="4"/>
             <a:r>
-              <a:rPr lang="ja-JP" altLang="en-US"/>
-              <a:t>第 </a:t>
-            </a:r>
-            <a:r>
-              <a:rPr lang="en-US" altLang="ja-JP"/>
-              <a:t>5 </a:t>
-            </a:r>
-            <a:r>
-              <a:rPr lang="ja-JP" altLang="en-US"/>
-              <a:t>レベル</a:t>
-            </a:r>
-            <a:endParaRPr lang="en-US" dirty="0"/>
+              <a:rPr lang="en-US"/>
+              <a:t>Fifth level</a:t>
+            </a:r>
           </a:p>
         </p:txBody>
       </p:sp>
@@ -487,11 +473,11 @@
           <a:bodyPr/>
           <a:lstStyle/>
           <a:p>
-            <a:fld id="{48A87A34-81AB-432B-8DAE-1953F412C126}" type="datetimeFigureOut">
-              <a:rPr lang="en-US" dirty="0"/>
-              <a:t>3/26/26</a:t>
+            <a:fld id="{241EB5C9-1307-BA42-ABA2-0BC069CD8E7F}" type="datetimeFigureOut">
+              <a:rPr lang="en-US" smtClean="0"/>
+              <a:t>1/2/22</a:t>
             </a:fld>
-            <a:endParaRPr lang="en-US" dirty="0"/>
+            <a:endParaRPr lang="en-US"/>
           </a:p>
         </p:txBody>
       </p:sp>
@@ -510,7 +496,7 @@
           <a:bodyPr/>
           <a:lstStyle/>
           <a:p>
-            <a:endParaRPr lang="en-US" dirty="0"/>
+            <a:endParaRPr lang="en-US"/>
           </a:p>
         </p:txBody>
       </p:sp>
@@ -529,46 +515,20 @@
           <a:bodyPr/>
           <a:lstStyle/>
           <a:p>
-            <a:fld id="{6D22F896-40B5-4ADD-8801-0D06FADFA095}" type="slidenum">
-              <a:rPr lang="en-US" dirty="0"/>
+            <a:fld id="{C5EF2332-01BF-834F-8236-50238282D533}" type="slidenum">
+              <a:rPr lang="en-US" smtClean="0"/>
               <a:t>‹#›</a:t>
             </a:fld>
-            <a:endParaRPr lang="en-US" dirty="0"/>
-          </a:p>
-        </p:txBody>
-      </p:sp>
-      <p:cxnSp>
-        <p:nvCxnSpPr>
-          <p:cNvPr id="26" name="Straight Connector 25"/>
-          <p:cNvCxnSpPr/>
-          <p:nvPr/>
-        </p:nvCxnSpPr>
-        <p:spPr>
-          <a:xfrm>
-            <a:off x="1453896" y="1847088"/>
-            <a:ext cx="9607522" cy="0"/>
-          </a:xfrm>
-          <a:prstGeom prst="line">
-            <a:avLst/>
-          </a:prstGeom>
-          <a:ln w="31750"/>
-        </p:spPr>
-        <p:style>
-          <a:lnRef idx="3">
-            <a:schemeClr val="accent1"/>
-          </a:lnRef>
-          <a:fillRef idx="0">
-            <a:schemeClr val="accent1"/>
-          </a:fillRef>
-          <a:effectRef idx="2">
-            <a:schemeClr val="accent1"/>
-          </a:effectRef>
-          <a:fontRef idx="minor">
-            <a:schemeClr val="tx1"/>
-          </a:fontRef>
-        </p:style>
-      </p:cxnSp>
+            <a:endParaRPr lang="en-US"/>
+          </a:p>
+        </p:txBody>
+      </p:sp>
     </p:spTree>
+    <p:extLst>
+      <p:ext uri="{BB962C8B-B14F-4D97-AF65-F5344CB8AC3E}">
+        <p14:creationId xmlns:p14="http://schemas.microsoft.com/office/powerpoint/2010/main" val="313914798"/>
+      </p:ext>
+    </p:extLst>
   </p:cSld>
   <p:clrMapOvr>
     <a:masterClrMapping/>
@@ -578,7 +538,7 @@
 
 <file path=ppt/slideLayouts/slideLayout11.xml><?xml version="1.0" encoding="utf-8"?>
 <p:sldLayout xmlns:a="http://schemas.openxmlformats.org/drawingml/2006/main" xmlns:r="http://schemas.openxmlformats.org/officeDocument/2006/relationships" xmlns:p="http://schemas.openxmlformats.org/presentationml/2006/main" type="vertTitleAndTx" preserve="1">
-  <p:cSld name="縦書きタイトルと&#10;縦書きテキスト">
+  <p:cSld name="Vertical Title and Text">
     <p:spTree>
       <p:nvGrpSpPr>
         <p:cNvPr id="1" name=""/>
@@ -605,23 +565,18 @@
         </p:nvSpPr>
         <p:spPr>
           <a:xfrm>
-            <a:off x="9439111" y="798973"/>
-            <a:ext cx="1615742" cy="4659889"/>
+            <a:off x="6629400" y="205979"/>
+            <a:ext cx="2057400" cy="4388644"/>
           </a:xfrm>
         </p:spPr>
         <p:txBody>
           <a:bodyPr vert="eaVert"/>
-          <a:lstStyle>
-            <a:lvl1pPr algn="l">
-              <a:defRPr/>
-            </a:lvl1pPr>
-          </a:lstStyle>
-          <a:p>
-            <a:r>
-              <a:rPr lang="ja-JP" altLang="en-US"/>
-              <a:t>マスター タイトルの書式設定</a:t>
-            </a:r>
-            <a:endParaRPr lang="en-US" dirty="0"/>
+          <a:lstStyle/>
+          <a:p>
+            <a:r>
+              <a:rPr lang="en-US"/>
+              <a:t>Click to edit Master title style</a:t>
+            </a:r>
           </a:p>
         </p:txBody>
       </p:sp>
@@ -637,8 +592,8 @@
         </p:nvSpPr>
         <p:spPr>
           <a:xfrm>
-            <a:off x="1444672" y="798973"/>
-            <a:ext cx="7828830" cy="4659889"/>
+            <a:off x="457200" y="205979"/>
+            <a:ext cx="6019800" cy="4388644"/>
           </a:xfrm>
         </p:spPr>
         <p:txBody>
@@ -647,70 +602,37 @@
           <a:p>
             <a:pPr lvl="0"/>
             <a:r>
-              <a:rPr lang="ja-JP" altLang="en-US"/>
-              <a:t>マスター テキストの書式設定</a:t>
+              <a:rPr lang="en-US"/>
+              <a:t>Click to edit Master text styles</a:t>
             </a:r>
           </a:p>
           <a:p>
             <a:pPr lvl="1"/>
             <a:r>
-              <a:rPr lang="ja-JP" altLang="en-US"/>
-              <a:t>第 </a:t>
-            </a:r>
-            <a:r>
-              <a:rPr lang="en-US" altLang="ja-JP"/>
-              <a:t>2 </a:t>
-            </a:r>
-            <a:r>
-              <a:rPr lang="ja-JP" altLang="en-US"/>
-              <a:t>レベル</a:t>
+              <a:rPr lang="en-US"/>
+              <a:t>Second level</a:t>
             </a:r>
           </a:p>
           <a:p>
             <a:pPr lvl="2"/>
             <a:r>
-              <a:rPr lang="ja-JP" altLang="en-US"/>
-              <a:t>第 </a:t>
-            </a:r>
-            <a:r>
-              <a:rPr lang="en-US" altLang="ja-JP"/>
-              <a:t>3 </a:t>
-            </a:r>
-            <a:r>
-              <a:rPr lang="ja-JP" altLang="en-US"/>
-              <a:t>レベル</a:t>
+              <a:rPr lang="en-US"/>
+              <a:t>Third level</a:t>
             </a:r>
           </a:p>
           <a:p>
             <a:pPr lvl="3"/>
             <a:r>
-              <a:rPr lang="ja-JP" altLang="en-US"/>
-              <a:t>第 </a:t>
-            </a:r>
-            <a:r>
-              <a:rPr lang="en-US" altLang="ja-JP"/>
-              <a:t>4 </a:t>
-            </a:r>
-            <a:r>
-              <a:rPr lang="ja-JP" altLang="en-US"/>
-              <a:t>レベル</a:t>
+              <a:rPr lang="en-US"/>
+              <a:t>Fourth level</a:t>
             </a:r>
           </a:p>
           <a:p>
             <a:pPr lvl="4"/>
             <a:r>
-              <a:rPr lang="ja-JP" altLang="en-US"/>
-              <a:t>第 </a:t>
-            </a:r>
-            <a:r>
-              <a:rPr lang="en-US" altLang="ja-JP"/>
-              <a:t>5 </a:t>
-            </a:r>
-            <a:r>
-              <a:rPr lang="ja-JP" altLang="en-US"/>
-              <a:t>レベル</a:t>
-            </a:r>
-            <a:endParaRPr lang="en-US" dirty="0"/>
+              <a:rPr lang="en-US"/>
+              <a:t>Fifth level</a:t>
+            </a:r>
           </a:p>
         </p:txBody>
       </p:sp>
@@ -729,11 +651,11 @@
           <a:bodyPr/>
           <a:lstStyle/>
           <a:p>
-            <a:fld id="{48A87A34-81AB-432B-8DAE-1953F412C126}" type="datetimeFigureOut">
-              <a:rPr lang="en-US" dirty="0"/>
-              <a:t>3/26/26</a:t>
+            <a:fld id="{241EB5C9-1307-BA42-ABA2-0BC069CD8E7F}" type="datetimeFigureOut">
+              <a:rPr lang="en-US" smtClean="0"/>
+              <a:t>1/2/22</a:t>
             </a:fld>
-            <a:endParaRPr lang="en-US" dirty="0"/>
+            <a:endParaRPr lang="en-US"/>
           </a:p>
         </p:txBody>
       </p:sp>
@@ -752,7 +674,7 @@
           <a:bodyPr/>
           <a:lstStyle/>
           <a:p>
-            <a:endParaRPr lang="en-US" dirty="0"/>
+            <a:endParaRPr lang="en-US"/>
           </a:p>
         </p:txBody>
       </p:sp>
@@ -771,46 +693,20 @@
           <a:bodyPr/>
           <a:lstStyle/>
           <a:p>
-            <a:fld id="{6D22F896-40B5-4ADD-8801-0D06FADFA095}" type="slidenum">
-              <a:rPr lang="en-US" dirty="0"/>
+            <a:fld id="{C5EF2332-01BF-834F-8236-50238282D533}" type="slidenum">
+              <a:rPr lang="en-US" smtClean="0"/>
               <a:t>‹#›</a:t>
             </a:fld>
-            <a:endParaRPr lang="en-US" dirty="0"/>
-          </a:p>
-        </p:txBody>
-      </p:sp>
-      <p:cxnSp>
-        <p:nvCxnSpPr>
-          <p:cNvPr id="15" name="Straight Connector 14"/>
-          <p:cNvCxnSpPr/>
-          <p:nvPr/>
-        </p:nvCxnSpPr>
-        <p:spPr>
-          <a:xfrm>
-            <a:off x="9439111" y="798973"/>
-            <a:ext cx="0" cy="4659889"/>
-          </a:xfrm>
-          <a:prstGeom prst="line">
-            <a:avLst/>
-          </a:prstGeom>
-          <a:ln w="31750"/>
-        </p:spPr>
-        <p:style>
-          <a:lnRef idx="3">
-            <a:schemeClr val="accent1"/>
-          </a:lnRef>
-          <a:fillRef idx="0">
-            <a:schemeClr val="accent1"/>
-          </a:fillRef>
-          <a:effectRef idx="2">
-            <a:schemeClr val="accent1"/>
-          </a:effectRef>
-          <a:fontRef idx="minor">
-            <a:schemeClr val="tx1"/>
-          </a:fontRef>
-        </p:style>
-      </p:cxnSp>
+            <a:endParaRPr lang="en-US"/>
+          </a:p>
+        </p:txBody>
+      </p:sp>
     </p:spTree>
+    <p:extLst>
+      <p:ext uri="{BB962C8B-B14F-4D97-AF65-F5344CB8AC3E}">
+        <p14:creationId xmlns:p14="http://schemas.microsoft.com/office/powerpoint/2010/main" val="2581529045"/>
+      </p:ext>
+    </p:extLst>
   </p:cSld>
   <p:clrMapOvr>
     <a:masterClrMapping/>
@@ -851,10 +747,9 @@
           <a:lstStyle/>
           <a:p>
             <a:r>
-              <a:rPr lang="ja-JP" altLang="en-US"/>
-              <a:t>マスター タイトルの書式設定</a:t>
-            </a:r>
-            <a:endParaRPr lang="en-US" dirty="0"/>
+              <a:rPr lang="en-US"/>
+              <a:t>Click to edit Master title style</a:t>
+            </a:r>
           </a:p>
         </p:txBody>
       </p:sp>
@@ -870,75 +765,42 @@
         </p:nvSpPr>
         <p:spPr/>
         <p:txBody>
-          <a:bodyPr anchor="t"/>
+          <a:bodyPr/>
           <a:lstStyle/>
           <a:p>
             <a:pPr lvl="0"/>
             <a:r>
-              <a:rPr lang="ja-JP" altLang="en-US"/>
-              <a:t>マスター テキストの書式設定</a:t>
+              <a:rPr lang="en-US"/>
+              <a:t>Click to edit Master text styles</a:t>
             </a:r>
           </a:p>
           <a:p>
             <a:pPr lvl="1"/>
             <a:r>
-              <a:rPr lang="ja-JP" altLang="en-US"/>
-              <a:t>第 </a:t>
-            </a:r>
-            <a:r>
-              <a:rPr lang="en-US" altLang="ja-JP"/>
-              <a:t>2 </a:t>
-            </a:r>
-            <a:r>
-              <a:rPr lang="ja-JP" altLang="en-US"/>
-              <a:t>レベル</a:t>
+              <a:rPr lang="en-US"/>
+              <a:t>Second level</a:t>
             </a:r>
           </a:p>
           <a:p>
             <a:pPr lvl="2"/>
             <a:r>
-              <a:rPr lang="ja-JP" altLang="en-US"/>
-              <a:t>第 </a:t>
-            </a:r>
-            <a:r>
-              <a:rPr lang="en-US" altLang="ja-JP"/>
-              <a:t>3 </a:t>
-            </a:r>
-            <a:r>
-              <a:rPr lang="ja-JP" altLang="en-US"/>
-              <a:t>レベル</a:t>
+              <a:rPr lang="en-US"/>
+              <a:t>Third level</a:t>
             </a:r>
           </a:p>
           <a:p>
             <a:pPr lvl="3"/>
             <a:r>
-              <a:rPr lang="ja-JP" altLang="en-US"/>
-              <a:t>第 </a:t>
-            </a:r>
-            <a:r>
-              <a:rPr lang="en-US" altLang="ja-JP"/>
-              <a:t>4 </a:t>
-            </a:r>
-            <a:r>
-              <a:rPr lang="ja-JP" altLang="en-US"/>
-              <a:t>レベル</a:t>
+              <a:rPr lang="en-US"/>
+              <a:t>Fourth level</a:t>
             </a:r>
           </a:p>
           <a:p>
             <a:pPr lvl="4"/>
             <a:r>
-              <a:rPr lang="ja-JP" altLang="en-US"/>
-              <a:t>第 </a:t>
-            </a:r>
-            <a:r>
-              <a:rPr lang="en-US" altLang="ja-JP"/>
-              <a:t>5 </a:t>
-            </a:r>
-            <a:r>
-              <a:rPr lang="ja-JP" altLang="en-US"/>
-              <a:t>レベル</a:t>
-            </a:r>
-            <a:endParaRPr lang="en-US" dirty="0"/>
+              <a:rPr lang="en-US"/>
+              <a:t>Fifth level</a:t>
+            </a:r>
           </a:p>
         </p:txBody>
       </p:sp>
@@ -957,11 +819,11 @@
           <a:bodyPr/>
           <a:lstStyle/>
           <a:p>
-            <a:fld id="{48A87A34-81AB-432B-8DAE-1953F412C126}" type="datetimeFigureOut">
-              <a:rPr lang="en-US" dirty="0"/>
-              <a:t>3/26/26</a:t>
+            <a:fld id="{241EB5C9-1307-BA42-ABA2-0BC069CD8E7F}" type="datetimeFigureOut">
+              <a:rPr lang="en-US" smtClean="0"/>
+              <a:t>1/2/22</a:t>
             </a:fld>
-            <a:endParaRPr lang="en-US" dirty="0"/>
+            <a:endParaRPr lang="en-US"/>
           </a:p>
         </p:txBody>
       </p:sp>
@@ -980,7 +842,7 @@
           <a:bodyPr/>
           <a:lstStyle/>
           <a:p>
-            <a:endParaRPr lang="en-US" dirty="0"/>
+            <a:endParaRPr lang="en-US"/>
           </a:p>
         </p:txBody>
       </p:sp>
@@ -999,46 +861,20 @@
           <a:bodyPr/>
           <a:lstStyle/>
           <a:p>
-            <a:fld id="{6D22F896-40B5-4ADD-8801-0D06FADFA095}" type="slidenum">
-              <a:rPr lang="en-US" dirty="0"/>
+            <a:fld id="{C5EF2332-01BF-834F-8236-50238282D533}" type="slidenum">
+              <a:rPr lang="en-US" smtClean="0"/>
               <a:t>‹#›</a:t>
             </a:fld>
-            <a:endParaRPr lang="en-US" dirty="0"/>
-          </a:p>
-        </p:txBody>
-      </p:sp>
-      <p:cxnSp>
-        <p:nvCxnSpPr>
-          <p:cNvPr id="33" name="Straight Connector 32"/>
-          <p:cNvCxnSpPr/>
-          <p:nvPr/>
-        </p:nvCxnSpPr>
-        <p:spPr>
-          <a:xfrm>
-            <a:off x="1453896" y="1847088"/>
-            <a:ext cx="9607522" cy="0"/>
-          </a:xfrm>
-          <a:prstGeom prst="line">
-            <a:avLst/>
-          </a:prstGeom>
-          <a:ln w="31750"/>
-        </p:spPr>
-        <p:style>
-          <a:lnRef idx="3">
-            <a:schemeClr val="accent1"/>
-          </a:lnRef>
-          <a:fillRef idx="0">
-            <a:schemeClr val="accent1"/>
-          </a:fillRef>
-          <a:effectRef idx="2">
-            <a:schemeClr val="accent1"/>
-          </a:effectRef>
-          <a:fontRef idx="minor">
-            <a:schemeClr val="tx1"/>
-          </a:fontRef>
-        </p:style>
-      </p:cxnSp>
+            <a:endParaRPr lang="en-US"/>
+          </a:p>
+        </p:txBody>
+      </p:sp>
     </p:spTree>
+    <p:extLst>
+      <p:ext uri="{BB962C8B-B14F-4D97-AF65-F5344CB8AC3E}">
+        <p14:creationId xmlns:p14="http://schemas.microsoft.com/office/powerpoint/2010/main" val="338346009"/>
+      </p:ext>
+    </p:extLst>
   </p:cSld>
   <p:clrMapOvr>
     <a:masterClrMapping/>
@@ -1075,25 +911,22 @@
         </p:nvSpPr>
         <p:spPr>
           <a:xfrm>
-            <a:off x="1454239" y="1756130"/>
-            <a:ext cx="8643154" cy="1887950"/>
+            <a:off x="722313" y="3305176"/>
+            <a:ext cx="7772400" cy="1021556"/>
           </a:xfrm>
         </p:spPr>
         <p:txBody>
-          <a:bodyPr anchor="b">
-            <a:normAutofit/>
-          </a:bodyPr>
+          <a:bodyPr anchor="t"/>
           <a:lstStyle>
             <a:lvl1pPr algn="l">
-              <a:defRPr sz="3600"/>
+              <a:defRPr sz="3000" b="1" cap="all"/>
             </a:lvl1pPr>
           </a:lstStyle>
           <a:p>
             <a:r>
-              <a:rPr lang="ja-JP" altLang="en-US"/>
-              <a:t>マスター タイトルの書式設定</a:t>
-            </a:r>
-            <a:endParaRPr lang="en-US" dirty="0"/>
+              <a:rPr lang="en-US"/>
+              <a:t>Click to edit Master title style</a:t>
+            </a:r>
           </a:p>
         </p:txBody>
       </p:sp>
@@ -1109,26 +942,26 @@
         </p:nvSpPr>
         <p:spPr>
           <a:xfrm>
-            <a:off x="1454239" y="3806195"/>
-            <a:ext cx="8630446" cy="1012929"/>
+            <a:off x="722313" y="2180035"/>
+            <a:ext cx="7772400" cy="1125140"/>
           </a:xfrm>
         </p:spPr>
         <p:txBody>
-          <a:bodyPr tIns="91440">
-            <a:normAutofit/>
-          </a:bodyPr>
+          <a:bodyPr anchor="b"/>
           <a:lstStyle>
-            <a:lvl1pPr marL="0" indent="0" algn="l">
-              <a:buNone/>
-              <a:defRPr sz="1800">
+            <a:lvl1pPr marL="0" indent="0">
+              <a:buNone/>
+              <a:defRPr sz="1500">
                 <a:solidFill>
-                  <a:schemeClr val="tx1"/>
+                  <a:schemeClr val="tx1">
+                    <a:tint val="75000"/>
+                  </a:schemeClr>
                 </a:solidFill>
               </a:defRPr>
             </a:lvl1pPr>
-            <a:lvl2pPr marL="457200" indent="0">
-              <a:buNone/>
-              <a:defRPr sz="1800">
+            <a:lvl2pPr marL="342900" indent="0">
+              <a:buNone/>
+              <a:defRPr sz="1350">
                 <a:solidFill>
                   <a:schemeClr val="tx1">
                     <a:tint val="75000"/>
@@ -1136,9 +969,9 @@
                 </a:solidFill>
               </a:defRPr>
             </a:lvl2pPr>
-            <a:lvl3pPr marL="914400" indent="0">
-              <a:buNone/>
-              <a:defRPr sz="1800">
+            <a:lvl3pPr marL="685800" indent="0">
+              <a:buNone/>
+              <a:defRPr sz="1200">
                 <a:solidFill>
                   <a:schemeClr val="tx1">
                     <a:tint val="75000"/>
@@ -1146,9 +979,9 @@
                 </a:solidFill>
               </a:defRPr>
             </a:lvl3pPr>
-            <a:lvl4pPr marL="1371600" indent="0">
-              <a:buNone/>
-              <a:defRPr sz="1600">
+            <a:lvl4pPr marL="1028700" indent="0">
+              <a:buNone/>
+              <a:defRPr sz="1050">
                 <a:solidFill>
                   <a:schemeClr val="tx1">
                     <a:tint val="75000"/>
@@ -1156,9 +989,9 @@
                 </a:solidFill>
               </a:defRPr>
             </a:lvl4pPr>
-            <a:lvl5pPr marL="1828800" indent="0">
-              <a:buNone/>
-              <a:defRPr sz="1600">
+            <a:lvl5pPr marL="1371600" indent="0">
+              <a:buNone/>
+              <a:defRPr sz="1050">
                 <a:solidFill>
                   <a:schemeClr val="tx1">
                     <a:tint val="75000"/>
@@ -1166,9 +999,9 @@
                 </a:solidFill>
               </a:defRPr>
             </a:lvl5pPr>
-            <a:lvl6pPr marL="2286000" indent="0">
-              <a:buNone/>
-              <a:defRPr sz="1600">
+            <a:lvl6pPr marL="1714500" indent="0">
+              <a:buNone/>
+              <a:defRPr sz="1050">
                 <a:solidFill>
                   <a:schemeClr val="tx1">
                     <a:tint val="75000"/>
@@ -1176,9 +1009,9 @@
                 </a:solidFill>
               </a:defRPr>
             </a:lvl6pPr>
-            <a:lvl7pPr marL="2743200" indent="0">
-              <a:buNone/>
-              <a:defRPr sz="1600">
+            <a:lvl7pPr marL="2057400" indent="0">
+              <a:buNone/>
+              <a:defRPr sz="1050">
                 <a:solidFill>
                   <a:schemeClr val="tx1">
                     <a:tint val="75000"/>
@@ -1186,9 +1019,9 @@
                 </a:solidFill>
               </a:defRPr>
             </a:lvl7pPr>
-            <a:lvl8pPr marL="3200400" indent="0">
-              <a:buNone/>
-              <a:defRPr sz="1600">
+            <a:lvl8pPr marL="2400300" indent="0">
+              <a:buNone/>
+              <a:defRPr sz="1050">
                 <a:solidFill>
                   <a:schemeClr val="tx1">
                     <a:tint val="75000"/>
@@ -1196,9 +1029,9 @@
                 </a:solidFill>
               </a:defRPr>
             </a:lvl8pPr>
-            <a:lvl9pPr marL="3657600" indent="0">
-              <a:buNone/>
-              <a:defRPr sz="1600">
+            <a:lvl9pPr marL="2743200" indent="0">
+              <a:buNone/>
+              <a:defRPr sz="1050">
                 <a:solidFill>
                   <a:schemeClr val="tx1">
                     <a:tint val="75000"/>
@@ -1210,8 +1043,8 @@
           <a:p>
             <a:pPr lvl="0"/>
             <a:r>
-              <a:rPr lang="ja-JP" altLang="en-US"/>
-              <a:t>マスター テキストの書式設定</a:t>
+              <a:rPr lang="en-US"/>
+              <a:t>Click to edit Master text styles</a:t>
             </a:r>
           </a:p>
         </p:txBody>
@@ -1231,11 +1064,11 @@
           <a:bodyPr/>
           <a:lstStyle/>
           <a:p>
-            <a:fld id="{48A87A34-81AB-432B-8DAE-1953F412C126}" type="datetimeFigureOut">
-              <a:rPr lang="en-US" dirty="0"/>
-              <a:t>3/26/26</a:t>
+            <a:fld id="{241EB5C9-1307-BA42-ABA2-0BC069CD8E7F}" type="datetimeFigureOut">
+              <a:rPr lang="en-US" smtClean="0"/>
+              <a:t>1/2/22</a:t>
             </a:fld>
-            <a:endParaRPr lang="en-US" dirty="0"/>
+            <a:endParaRPr lang="en-US"/>
           </a:p>
         </p:txBody>
       </p:sp>
@@ -1254,7 +1087,7 @@
           <a:bodyPr/>
           <a:lstStyle/>
           <a:p>
-            <a:endParaRPr lang="en-US" dirty="0"/>
+            <a:endParaRPr lang="en-US"/>
           </a:p>
         </p:txBody>
       </p:sp>
@@ -1273,46 +1106,20 @@
           <a:bodyPr/>
           <a:lstStyle/>
           <a:p>
-            <a:fld id="{6D22F896-40B5-4ADD-8801-0D06FADFA095}" type="slidenum">
-              <a:rPr lang="en-US" dirty="0"/>
+            <a:fld id="{C5EF2332-01BF-834F-8236-50238282D533}" type="slidenum">
+              <a:rPr lang="en-US" smtClean="0"/>
               <a:t>‹#›</a:t>
             </a:fld>
-            <a:endParaRPr lang="en-US" dirty="0"/>
-          </a:p>
-        </p:txBody>
-      </p:sp>
-      <p:cxnSp>
-        <p:nvCxnSpPr>
-          <p:cNvPr id="15" name="Straight Connector 14"/>
-          <p:cNvCxnSpPr/>
-          <p:nvPr/>
-        </p:nvCxnSpPr>
-        <p:spPr>
-          <a:xfrm>
-            <a:off x="1454239" y="3804985"/>
-            <a:ext cx="8630446" cy="0"/>
-          </a:xfrm>
-          <a:prstGeom prst="line">
-            <a:avLst/>
-          </a:prstGeom>
-          <a:ln w="31750"/>
-        </p:spPr>
-        <p:style>
-          <a:lnRef idx="3">
-            <a:schemeClr val="accent1"/>
-          </a:lnRef>
-          <a:fillRef idx="0">
-            <a:schemeClr val="accent1"/>
-          </a:fillRef>
-          <a:effectRef idx="2">
-            <a:schemeClr val="accent1"/>
-          </a:effectRef>
-          <a:fontRef idx="minor">
-            <a:schemeClr val="tx1"/>
-          </a:fontRef>
-        </p:style>
-      </p:cxnSp>
+            <a:endParaRPr lang="en-US"/>
+          </a:p>
+        </p:txBody>
+      </p:sp>
     </p:spTree>
+    <p:extLst>
+      <p:ext uri="{BB962C8B-B14F-4D97-AF65-F5344CB8AC3E}">
+        <p14:creationId xmlns:p14="http://schemas.microsoft.com/office/powerpoint/2010/main" val="1073069076"/>
+      </p:ext>
+    </p:extLst>
   </p:cSld>
   <p:clrMapOvr>
     <a:masterClrMapping/>
@@ -1347,199 +1154,183 @@
             <p:ph type="title"/>
           </p:nvPr>
         </p:nvSpPr>
+        <p:spPr/>
+        <p:txBody>
+          <a:bodyPr/>
+          <a:lstStyle/>
+          <a:p>
+            <a:r>
+              <a:rPr lang="en-US"/>
+              <a:t>Click to edit Master title style</a:t>
+            </a:r>
+          </a:p>
+        </p:txBody>
+      </p:sp>
+      <p:sp>
+        <p:nvSpPr>
+          <p:cNvPr id="3" name="Content Placeholder 2"/>
+          <p:cNvSpPr>
+            <a:spLocks noGrp="1"/>
+          </p:cNvSpPr>
+          <p:nvPr>
+            <p:ph sz="half" idx="1"/>
+          </p:nvPr>
+        </p:nvSpPr>
         <p:spPr>
           <a:xfrm>
-            <a:off x="1449217" y="804889"/>
-            <a:ext cx="9605635" cy="1059305"/>
+            <a:off x="457200" y="1200151"/>
+            <a:ext cx="4038600" cy="3394472"/>
           </a:xfrm>
         </p:spPr>
         <p:txBody>
           <a:bodyPr/>
-          <a:lstStyle/>
-          <a:p>
-            <a:r>
-              <a:rPr lang="ja-JP" altLang="en-US"/>
-              <a:t>マスター タイトルの書式設定</a:t>
-            </a:r>
-            <a:endParaRPr lang="en-US" dirty="0"/>
-          </a:p>
-        </p:txBody>
-      </p:sp>
-      <p:sp>
-        <p:nvSpPr>
-          <p:cNvPr id="3" name="Content Placeholder 2"/>
-          <p:cNvSpPr>
-            <a:spLocks noGrp="1"/>
-          </p:cNvSpPr>
-          <p:nvPr>
-            <p:ph sz="half" idx="1"/>
+          <a:lstStyle>
+            <a:lvl1pPr>
+              <a:defRPr sz="2100"/>
+            </a:lvl1pPr>
+            <a:lvl2pPr>
+              <a:defRPr sz="1800"/>
+            </a:lvl2pPr>
+            <a:lvl3pPr>
+              <a:defRPr sz="1500"/>
+            </a:lvl3pPr>
+            <a:lvl4pPr>
+              <a:defRPr sz="1350"/>
+            </a:lvl4pPr>
+            <a:lvl5pPr>
+              <a:defRPr sz="1350"/>
+            </a:lvl5pPr>
+            <a:lvl6pPr>
+              <a:defRPr sz="1350"/>
+            </a:lvl6pPr>
+            <a:lvl7pPr>
+              <a:defRPr sz="1350"/>
+            </a:lvl7pPr>
+            <a:lvl8pPr>
+              <a:defRPr sz="1350"/>
+            </a:lvl8pPr>
+            <a:lvl9pPr>
+              <a:defRPr sz="1350"/>
+            </a:lvl9pPr>
+          </a:lstStyle>
+          <a:p>
+            <a:pPr lvl="0"/>
+            <a:r>
+              <a:rPr lang="en-US"/>
+              <a:t>Click to edit Master text styles</a:t>
+            </a:r>
+          </a:p>
+          <a:p>
+            <a:pPr lvl="1"/>
+            <a:r>
+              <a:rPr lang="en-US"/>
+              <a:t>Second level</a:t>
+            </a:r>
+          </a:p>
+          <a:p>
+            <a:pPr lvl="2"/>
+            <a:r>
+              <a:rPr lang="en-US"/>
+              <a:t>Third level</a:t>
+            </a:r>
+          </a:p>
+          <a:p>
+            <a:pPr lvl="3"/>
+            <a:r>
+              <a:rPr lang="en-US"/>
+              <a:t>Fourth level</a:t>
+            </a:r>
+          </a:p>
+          <a:p>
+            <a:pPr lvl="4"/>
+            <a:r>
+              <a:rPr lang="en-US"/>
+              <a:t>Fifth level</a:t>
+            </a:r>
+          </a:p>
+        </p:txBody>
+      </p:sp>
+      <p:sp>
+        <p:nvSpPr>
+          <p:cNvPr id="4" name="Content Placeholder 3"/>
+          <p:cNvSpPr>
+            <a:spLocks noGrp="1"/>
+          </p:cNvSpPr>
+          <p:nvPr>
+            <p:ph sz="half" idx="2"/>
           </p:nvPr>
         </p:nvSpPr>
         <p:spPr>
           <a:xfrm>
-            <a:off x="1447331" y="2010878"/>
-            <a:ext cx="4645152" cy="3448595"/>
+            <a:off x="4648200" y="1200151"/>
+            <a:ext cx="4038600" cy="3394472"/>
           </a:xfrm>
         </p:spPr>
         <p:txBody>
           <a:bodyPr/>
-          <a:lstStyle/>
+          <a:lstStyle>
+            <a:lvl1pPr>
+              <a:defRPr sz="2100"/>
+            </a:lvl1pPr>
+            <a:lvl2pPr>
+              <a:defRPr sz="1800"/>
+            </a:lvl2pPr>
+            <a:lvl3pPr>
+              <a:defRPr sz="1500"/>
+            </a:lvl3pPr>
+            <a:lvl4pPr>
+              <a:defRPr sz="1350"/>
+            </a:lvl4pPr>
+            <a:lvl5pPr>
+              <a:defRPr sz="1350"/>
+            </a:lvl5pPr>
+            <a:lvl6pPr>
+              <a:defRPr sz="1350"/>
+            </a:lvl6pPr>
+            <a:lvl7pPr>
+              <a:defRPr sz="1350"/>
+            </a:lvl7pPr>
+            <a:lvl8pPr>
+              <a:defRPr sz="1350"/>
+            </a:lvl8pPr>
+            <a:lvl9pPr>
+              <a:defRPr sz="1350"/>
+            </a:lvl9pPr>
+          </a:lstStyle>
           <a:p>
             <a:pPr lvl="0"/>
             <a:r>
-              <a:rPr lang="ja-JP" altLang="en-US"/>
-              <a:t>マスター テキストの書式設定</a:t>
+              <a:rPr lang="en-US"/>
+              <a:t>Click to edit Master text styles</a:t>
             </a:r>
           </a:p>
           <a:p>
             <a:pPr lvl="1"/>
             <a:r>
-              <a:rPr lang="ja-JP" altLang="en-US"/>
-              <a:t>第 </a:t>
-            </a:r>
-            <a:r>
-              <a:rPr lang="en-US" altLang="ja-JP"/>
-              <a:t>2 </a:t>
-            </a:r>
-            <a:r>
-              <a:rPr lang="ja-JP" altLang="en-US"/>
-              <a:t>レベル</a:t>
+              <a:rPr lang="en-US"/>
+              <a:t>Second level</a:t>
             </a:r>
           </a:p>
           <a:p>
             <a:pPr lvl="2"/>
             <a:r>
-              <a:rPr lang="ja-JP" altLang="en-US"/>
-              <a:t>第 </a:t>
-            </a:r>
-            <a:r>
-              <a:rPr lang="en-US" altLang="ja-JP"/>
-              <a:t>3 </a:t>
-            </a:r>
-            <a:r>
-              <a:rPr lang="ja-JP" altLang="en-US"/>
-              <a:t>レベル</a:t>
+              <a:rPr lang="en-US"/>
+              <a:t>Third level</a:t>
             </a:r>
           </a:p>
           <a:p>
             <a:pPr lvl="3"/>
             <a:r>
-              <a:rPr lang="ja-JP" altLang="en-US"/>
-              <a:t>第 </a:t>
-            </a:r>
-            <a:r>
-              <a:rPr lang="en-US" altLang="ja-JP"/>
-              <a:t>4 </a:t>
-            </a:r>
-            <a:r>
-              <a:rPr lang="ja-JP" altLang="en-US"/>
-              <a:t>レベル</a:t>
+              <a:rPr lang="en-US"/>
+              <a:t>Fourth level</a:t>
             </a:r>
           </a:p>
           <a:p>
             <a:pPr lvl="4"/>
             <a:r>
-              <a:rPr lang="ja-JP" altLang="en-US"/>
-              <a:t>第 </a:t>
-            </a:r>
-            <a:r>
-              <a:rPr lang="en-US" altLang="ja-JP"/>
-              <a:t>5 </a:t>
-            </a:r>
-            <a:r>
-              <a:rPr lang="ja-JP" altLang="en-US"/>
-              <a:t>レベル</a:t>
-            </a:r>
-            <a:endParaRPr lang="en-US" dirty="0"/>
-          </a:p>
-        </p:txBody>
-      </p:sp>
-      <p:sp>
-        <p:nvSpPr>
-          <p:cNvPr id="4" name="Content Placeholder 3"/>
-          <p:cNvSpPr>
-            <a:spLocks noGrp="1"/>
-          </p:cNvSpPr>
-          <p:nvPr>
-            <p:ph sz="half" idx="2"/>
-          </p:nvPr>
-        </p:nvSpPr>
-        <p:spPr>
-          <a:xfrm>
-            <a:off x="6413771" y="2017343"/>
-            <a:ext cx="4645152" cy="3441520"/>
-          </a:xfrm>
-        </p:spPr>
-        <p:txBody>
-          <a:bodyPr/>
-          <a:lstStyle/>
-          <a:p>
-            <a:pPr lvl="0"/>
-            <a:r>
-              <a:rPr lang="ja-JP" altLang="en-US"/>
-              <a:t>マスター テキストの書式設定</a:t>
-            </a:r>
-          </a:p>
-          <a:p>
-            <a:pPr lvl="1"/>
-            <a:r>
-              <a:rPr lang="ja-JP" altLang="en-US"/>
-              <a:t>第 </a:t>
-            </a:r>
-            <a:r>
-              <a:rPr lang="en-US" altLang="ja-JP"/>
-              <a:t>2 </a:t>
-            </a:r>
-            <a:r>
-              <a:rPr lang="ja-JP" altLang="en-US"/>
-              <a:t>レベル</a:t>
-            </a:r>
-          </a:p>
-          <a:p>
-            <a:pPr lvl="2"/>
-            <a:r>
-              <a:rPr lang="ja-JP" altLang="en-US"/>
-              <a:t>第 </a:t>
-            </a:r>
-            <a:r>
-              <a:rPr lang="en-US" altLang="ja-JP"/>
-              <a:t>3 </a:t>
-            </a:r>
-            <a:r>
-              <a:rPr lang="ja-JP" altLang="en-US"/>
-              <a:t>レベル</a:t>
-            </a:r>
-          </a:p>
-          <a:p>
-            <a:pPr lvl="3"/>
-            <a:r>
-              <a:rPr lang="ja-JP" altLang="en-US"/>
-              <a:t>第 </a:t>
-            </a:r>
-            <a:r>
-              <a:rPr lang="en-US" altLang="ja-JP"/>
-              <a:t>4 </a:t>
-            </a:r>
-            <a:r>
-              <a:rPr lang="ja-JP" altLang="en-US"/>
-              <a:t>レベル</a:t>
-            </a:r>
-          </a:p>
-          <a:p>
-            <a:pPr lvl="4"/>
-            <a:r>
-              <a:rPr lang="ja-JP" altLang="en-US"/>
-              <a:t>第 </a:t>
-            </a:r>
-            <a:r>
-              <a:rPr lang="en-US" altLang="ja-JP"/>
-              <a:t>5 </a:t>
-            </a:r>
-            <a:r>
-              <a:rPr lang="ja-JP" altLang="en-US"/>
-              <a:t>レベル</a:t>
-            </a:r>
-            <a:endParaRPr lang="en-US" dirty="0"/>
+              <a:rPr lang="en-US"/>
+              <a:t>Fifth level</a:t>
+            </a:r>
           </a:p>
         </p:txBody>
       </p:sp>
@@ -1558,11 +1349,11 @@
           <a:bodyPr/>
           <a:lstStyle/>
           <a:p>
-            <a:fld id="{48A87A34-81AB-432B-8DAE-1953F412C126}" type="datetimeFigureOut">
-              <a:rPr lang="en-US" dirty="0"/>
-              <a:t>3/26/26</a:t>
+            <a:fld id="{241EB5C9-1307-BA42-ABA2-0BC069CD8E7F}" type="datetimeFigureOut">
+              <a:rPr lang="en-US" smtClean="0"/>
+              <a:t>1/2/22</a:t>
             </a:fld>
-            <a:endParaRPr lang="en-US" dirty="0"/>
+            <a:endParaRPr lang="en-US"/>
           </a:p>
         </p:txBody>
       </p:sp>
@@ -1581,7 +1372,7 @@
           <a:bodyPr/>
           <a:lstStyle/>
           <a:p>
-            <a:endParaRPr lang="en-US" dirty="0"/>
+            <a:endParaRPr lang="en-US"/>
           </a:p>
         </p:txBody>
       </p:sp>
@@ -1600,46 +1391,20 @@
           <a:bodyPr/>
           <a:lstStyle/>
           <a:p>
-            <a:fld id="{6D22F896-40B5-4ADD-8801-0D06FADFA095}" type="slidenum">
-              <a:rPr lang="en-US" dirty="0"/>
+            <a:fld id="{C5EF2332-01BF-834F-8236-50238282D533}" type="slidenum">
+              <a:rPr lang="en-US" smtClean="0"/>
               <a:t>‹#›</a:t>
             </a:fld>
-            <a:endParaRPr lang="en-US" dirty="0"/>
-          </a:p>
-        </p:txBody>
-      </p:sp>
-      <p:cxnSp>
-        <p:nvCxnSpPr>
-          <p:cNvPr id="35" name="Straight Connector 34"/>
-          <p:cNvCxnSpPr/>
-          <p:nvPr/>
-        </p:nvCxnSpPr>
-        <p:spPr>
-          <a:xfrm>
-            <a:off x="1453896" y="1847088"/>
-            <a:ext cx="9607522" cy="0"/>
-          </a:xfrm>
-          <a:prstGeom prst="line">
-            <a:avLst/>
-          </a:prstGeom>
-          <a:ln w="31750"/>
-        </p:spPr>
-        <p:style>
-          <a:lnRef idx="3">
-            <a:schemeClr val="accent1"/>
-          </a:lnRef>
-          <a:fillRef idx="0">
-            <a:schemeClr val="accent1"/>
-          </a:fillRef>
-          <a:effectRef idx="2">
-            <a:schemeClr val="accent1"/>
-          </a:effectRef>
-          <a:fontRef idx="minor">
-            <a:schemeClr val="tx1"/>
-          </a:fontRef>
-        </p:style>
-      </p:cxnSp>
+            <a:endParaRPr lang="en-US"/>
+          </a:p>
+        </p:txBody>
+      </p:sp>
     </p:spTree>
+    <p:extLst>
+      <p:ext uri="{BB962C8B-B14F-4D97-AF65-F5344CB8AC3E}">
+        <p14:creationId xmlns:p14="http://schemas.microsoft.com/office/powerpoint/2010/main" val="2619886245"/>
+      </p:ext>
+    </p:extLst>
   </p:cSld>
   <p:clrMapOvr>
     <a:masterClrMapping/>
@@ -1674,347 +1439,317 @@
             <p:ph type="title"/>
           </p:nvPr>
         </p:nvSpPr>
+        <p:spPr/>
+        <p:txBody>
+          <a:bodyPr/>
+          <a:lstStyle>
+            <a:lvl1pPr>
+              <a:defRPr/>
+            </a:lvl1pPr>
+          </a:lstStyle>
+          <a:p>
+            <a:r>
+              <a:rPr lang="en-US"/>
+              <a:t>Click to edit Master title style</a:t>
+            </a:r>
+          </a:p>
+        </p:txBody>
+      </p:sp>
+      <p:sp>
+        <p:nvSpPr>
+          <p:cNvPr id="3" name="Text Placeholder 2"/>
+          <p:cNvSpPr>
+            <a:spLocks noGrp="1"/>
+          </p:cNvSpPr>
+          <p:nvPr>
+            <p:ph type="body" idx="1"/>
+          </p:nvPr>
+        </p:nvSpPr>
         <p:spPr>
           <a:xfrm>
-            <a:off x="1447191" y="804163"/>
-            <a:ext cx="9607661" cy="1056319"/>
+            <a:off x="457200" y="1151335"/>
+            <a:ext cx="4040188" cy="479822"/>
           </a:xfrm>
         </p:spPr>
         <p:txBody>
-          <a:bodyPr/>
-          <a:lstStyle/>
-          <a:p>
-            <a:r>
-              <a:rPr lang="ja-JP" altLang="en-US"/>
-              <a:t>マスター タイトルの書式設定</a:t>
-            </a:r>
-            <a:endParaRPr lang="en-US" dirty="0"/>
-          </a:p>
-        </p:txBody>
-      </p:sp>
-      <p:sp>
-        <p:nvSpPr>
-          <p:cNvPr id="3" name="Text Placeholder 2"/>
-          <p:cNvSpPr>
-            <a:spLocks noGrp="1"/>
-          </p:cNvSpPr>
-          <p:nvPr>
-            <p:ph type="body" idx="1"/>
+          <a:bodyPr anchor="b"/>
+          <a:lstStyle>
+            <a:lvl1pPr marL="0" indent="0">
+              <a:buNone/>
+              <a:defRPr sz="1800" b="1"/>
+            </a:lvl1pPr>
+            <a:lvl2pPr marL="342900" indent="0">
+              <a:buNone/>
+              <a:defRPr sz="1500" b="1"/>
+            </a:lvl2pPr>
+            <a:lvl3pPr marL="685800" indent="0">
+              <a:buNone/>
+              <a:defRPr sz="1350" b="1"/>
+            </a:lvl3pPr>
+            <a:lvl4pPr marL="1028700" indent="0">
+              <a:buNone/>
+              <a:defRPr sz="1200" b="1"/>
+            </a:lvl4pPr>
+            <a:lvl5pPr marL="1371600" indent="0">
+              <a:buNone/>
+              <a:defRPr sz="1200" b="1"/>
+            </a:lvl5pPr>
+            <a:lvl6pPr marL="1714500" indent="0">
+              <a:buNone/>
+              <a:defRPr sz="1200" b="1"/>
+            </a:lvl6pPr>
+            <a:lvl7pPr marL="2057400" indent="0">
+              <a:buNone/>
+              <a:defRPr sz="1200" b="1"/>
+            </a:lvl7pPr>
+            <a:lvl8pPr marL="2400300" indent="0">
+              <a:buNone/>
+              <a:defRPr sz="1200" b="1"/>
+            </a:lvl8pPr>
+            <a:lvl9pPr marL="2743200" indent="0">
+              <a:buNone/>
+              <a:defRPr sz="1200" b="1"/>
+            </a:lvl9pPr>
+          </a:lstStyle>
+          <a:p>
+            <a:pPr lvl="0"/>
+            <a:r>
+              <a:rPr lang="en-US"/>
+              <a:t>Click to edit Master text styles</a:t>
+            </a:r>
+          </a:p>
+        </p:txBody>
+      </p:sp>
+      <p:sp>
+        <p:nvSpPr>
+          <p:cNvPr id="4" name="Content Placeholder 3"/>
+          <p:cNvSpPr>
+            <a:spLocks noGrp="1"/>
+          </p:cNvSpPr>
+          <p:nvPr>
+            <p:ph sz="half" idx="2"/>
           </p:nvPr>
         </p:nvSpPr>
         <p:spPr>
           <a:xfrm>
-            <a:off x="1447191" y="2019549"/>
-            <a:ext cx="4645152" cy="801943"/>
+            <a:off x="457200" y="1631156"/>
+            <a:ext cx="4040188" cy="2963466"/>
           </a:xfrm>
         </p:spPr>
         <p:txBody>
-          <a:bodyPr anchor="b">
-            <a:normAutofit/>
-          </a:bodyPr>
+          <a:bodyPr/>
+          <a:lstStyle>
+            <a:lvl1pPr>
+              <a:defRPr sz="1800"/>
+            </a:lvl1pPr>
+            <a:lvl2pPr>
+              <a:defRPr sz="1500"/>
+            </a:lvl2pPr>
+            <a:lvl3pPr>
+              <a:defRPr sz="1350"/>
+            </a:lvl3pPr>
+            <a:lvl4pPr>
+              <a:defRPr sz="1200"/>
+            </a:lvl4pPr>
+            <a:lvl5pPr>
+              <a:defRPr sz="1200"/>
+            </a:lvl5pPr>
+            <a:lvl6pPr>
+              <a:defRPr sz="1200"/>
+            </a:lvl6pPr>
+            <a:lvl7pPr>
+              <a:defRPr sz="1200"/>
+            </a:lvl7pPr>
+            <a:lvl8pPr>
+              <a:defRPr sz="1200"/>
+            </a:lvl8pPr>
+            <a:lvl9pPr>
+              <a:defRPr sz="1200"/>
+            </a:lvl9pPr>
+          </a:lstStyle>
+          <a:p>
+            <a:pPr lvl="0"/>
+            <a:r>
+              <a:rPr lang="en-US"/>
+              <a:t>Click to edit Master text styles</a:t>
+            </a:r>
+          </a:p>
+          <a:p>
+            <a:pPr lvl="1"/>
+            <a:r>
+              <a:rPr lang="en-US"/>
+              <a:t>Second level</a:t>
+            </a:r>
+          </a:p>
+          <a:p>
+            <a:pPr lvl="2"/>
+            <a:r>
+              <a:rPr lang="en-US"/>
+              <a:t>Third level</a:t>
+            </a:r>
+          </a:p>
+          <a:p>
+            <a:pPr lvl="3"/>
+            <a:r>
+              <a:rPr lang="en-US"/>
+              <a:t>Fourth level</a:t>
+            </a:r>
+          </a:p>
+          <a:p>
+            <a:pPr lvl="4"/>
+            <a:r>
+              <a:rPr lang="en-US"/>
+              <a:t>Fifth level</a:t>
+            </a:r>
+          </a:p>
+        </p:txBody>
+      </p:sp>
+      <p:sp>
+        <p:nvSpPr>
+          <p:cNvPr id="5" name="Text Placeholder 4"/>
+          <p:cNvSpPr>
+            <a:spLocks noGrp="1"/>
+          </p:cNvSpPr>
+          <p:nvPr>
+            <p:ph type="body" sz="quarter" idx="3"/>
+          </p:nvPr>
+        </p:nvSpPr>
+        <p:spPr>
+          <a:xfrm>
+            <a:off x="4645026" y="1151335"/>
+            <a:ext cx="4041775" cy="479822"/>
+          </a:xfrm>
+        </p:spPr>
+        <p:txBody>
+          <a:bodyPr anchor="b"/>
           <a:lstStyle>
             <a:lvl1pPr marL="0" indent="0">
-              <a:lnSpc>
-                <a:spcPct val="100000"/>
-              </a:lnSpc>
-              <a:buNone/>
-              <a:defRPr sz="2200" b="0" cap="all" baseline="0">
-                <a:solidFill>
-                  <a:schemeClr val="accent1"/>
-                </a:solidFill>
-              </a:defRPr>
+              <a:buNone/>
+              <a:defRPr sz="1800" b="1"/>
             </a:lvl1pPr>
-            <a:lvl2pPr marL="457200" indent="0">
-              <a:buNone/>
-              <a:defRPr sz="2000" b="1"/>
+            <a:lvl2pPr marL="342900" indent="0">
+              <a:buNone/>
+              <a:defRPr sz="1500" b="1"/>
             </a:lvl2pPr>
-            <a:lvl3pPr marL="914400" indent="0">
-              <a:buNone/>
-              <a:defRPr sz="1800" b="1"/>
+            <a:lvl3pPr marL="685800" indent="0">
+              <a:buNone/>
+              <a:defRPr sz="1350" b="1"/>
             </a:lvl3pPr>
-            <a:lvl4pPr marL="1371600" indent="0">
-              <a:buNone/>
-              <a:defRPr sz="1600" b="1"/>
+            <a:lvl4pPr marL="1028700" indent="0">
+              <a:buNone/>
+              <a:defRPr sz="1200" b="1"/>
             </a:lvl4pPr>
-            <a:lvl5pPr marL="1828800" indent="0">
-              <a:buNone/>
-              <a:defRPr sz="1600" b="1"/>
+            <a:lvl5pPr marL="1371600" indent="0">
+              <a:buNone/>
+              <a:defRPr sz="1200" b="1"/>
             </a:lvl5pPr>
-            <a:lvl6pPr marL="2286000" indent="0">
-              <a:buNone/>
-              <a:defRPr sz="1600" b="1"/>
+            <a:lvl6pPr marL="1714500" indent="0">
+              <a:buNone/>
+              <a:defRPr sz="1200" b="1"/>
             </a:lvl6pPr>
-            <a:lvl7pPr marL="2743200" indent="0">
-              <a:buNone/>
-              <a:defRPr sz="1600" b="1"/>
+            <a:lvl7pPr marL="2057400" indent="0">
+              <a:buNone/>
+              <a:defRPr sz="1200" b="1"/>
             </a:lvl7pPr>
-            <a:lvl8pPr marL="3200400" indent="0">
-              <a:buNone/>
-              <a:defRPr sz="1600" b="1"/>
+            <a:lvl8pPr marL="2400300" indent="0">
+              <a:buNone/>
+              <a:defRPr sz="1200" b="1"/>
             </a:lvl8pPr>
-            <a:lvl9pPr marL="3657600" indent="0">
-              <a:buNone/>
-              <a:defRPr sz="1600" b="1"/>
+            <a:lvl9pPr marL="2743200" indent="0">
+              <a:buNone/>
+              <a:defRPr sz="1200" b="1"/>
             </a:lvl9pPr>
           </a:lstStyle>
           <a:p>
             <a:pPr lvl="0"/>
             <a:r>
-              <a:rPr lang="ja-JP" altLang="en-US"/>
-              <a:t>マスター テキストの書式設定</a:t>
-            </a:r>
-          </a:p>
-        </p:txBody>
-      </p:sp>
-      <p:sp>
-        <p:nvSpPr>
-          <p:cNvPr id="4" name="Content Placeholder 3"/>
-          <p:cNvSpPr>
-            <a:spLocks noGrp="1"/>
-          </p:cNvSpPr>
-          <p:nvPr>
-            <p:ph sz="half" idx="2"/>
+              <a:rPr lang="en-US"/>
+              <a:t>Click to edit Master text styles</a:t>
+            </a:r>
+          </a:p>
+        </p:txBody>
+      </p:sp>
+      <p:sp>
+        <p:nvSpPr>
+          <p:cNvPr id="6" name="Content Placeholder 5"/>
+          <p:cNvSpPr>
+            <a:spLocks noGrp="1"/>
+          </p:cNvSpPr>
+          <p:nvPr>
+            <p:ph sz="quarter" idx="4"/>
           </p:nvPr>
         </p:nvSpPr>
         <p:spPr>
           <a:xfrm>
-            <a:off x="1447191" y="2824269"/>
-            <a:ext cx="4645152" cy="2644457"/>
+            <a:off x="4645026" y="1631156"/>
+            <a:ext cx="4041775" cy="2963466"/>
           </a:xfrm>
         </p:spPr>
         <p:txBody>
           <a:bodyPr/>
-          <a:lstStyle/>
-          <a:p>
-            <a:pPr lvl="0"/>
-            <a:r>
-              <a:rPr lang="ja-JP" altLang="en-US"/>
-              <a:t>マスター テキストの書式設定</a:t>
-            </a:r>
-          </a:p>
-          <a:p>
-            <a:pPr lvl="1"/>
-            <a:r>
-              <a:rPr lang="ja-JP" altLang="en-US"/>
-              <a:t>第 </a:t>
-            </a:r>
-            <a:r>
-              <a:rPr lang="en-US" altLang="ja-JP"/>
-              <a:t>2 </a:t>
-            </a:r>
-            <a:r>
-              <a:rPr lang="ja-JP" altLang="en-US"/>
-              <a:t>レベル</a:t>
-            </a:r>
-          </a:p>
-          <a:p>
-            <a:pPr lvl="2"/>
-            <a:r>
-              <a:rPr lang="ja-JP" altLang="en-US"/>
-              <a:t>第 </a:t>
-            </a:r>
-            <a:r>
-              <a:rPr lang="en-US" altLang="ja-JP"/>
-              <a:t>3 </a:t>
-            </a:r>
-            <a:r>
-              <a:rPr lang="ja-JP" altLang="en-US"/>
-              <a:t>レベル</a:t>
-            </a:r>
-          </a:p>
-          <a:p>
-            <a:pPr lvl="3"/>
-            <a:r>
-              <a:rPr lang="ja-JP" altLang="en-US"/>
-              <a:t>第 </a:t>
-            </a:r>
-            <a:r>
-              <a:rPr lang="en-US" altLang="ja-JP"/>
-              <a:t>4 </a:t>
-            </a:r>
-            <a:r>
-              <a:rPr lang="ja-JP" altLang="en-US"/>
-              <a:t>レベル</a:t>
-            </a:r>
-          </a:p>
-          <a:p>
-            <a:pPr lvl="4"/>
-            <a:r>
-              <a:rPr lang="ja-JP" altLang="en-US"/>
-              <a:t>第 </a:t>
-            </a:r>
-            <a:r>
-              <a:rPr lang="en-US" altLang="ja-JP"/>
-              <a:t>5 </a:t>
-            </a:r>
-            <a:r>
-              <a:rPr lang="ja-JP" altLang="en-US"/>
-              <a:t>レベル</a:t>
-            </a:r>
-            <a:endParaRPr lang="en-US" dirty="0"/>
-          </a:p>
-        </p:txBody>
-      </p:sp>
-      <p:sp>
-        <p:nvSpPr>
-          <p:cNvPr id="5" name="Text Placeholder 4"/>
-          <p:cNvSpPr>
-            <a:spLocks noGrp="1"/>
-          </p:cNvSpPr>
-          <p:nvPr>
-            <p:ph type="body" sz="quarter" idx="3"/>
-          </p:nvPr>
-        </p:nvSpPr>
-        <p:spPr>
-          <a:xfrm>
-            <a:off x="6412362" y="2023003"/>
-            <a:ext cx="4645152" cy="802237"/>
-          </a:xfrm>
-        </p:spPr>
-        <p:txBody>
-          <a:bodyPr anchor="b">
-            <a:normAutofit/>
-          </a:bodyPr>
           <a:lstStyle>
-            <a:lvl1pPr marL="0" indent="0">
-              <a:lnSpc>
-                <a:spcPct val="100000"/>
-              </a:lnSpc>
-              <a:buNone/>
-              <a:defRPr sz="2200" b="0" cap="all" baseline="0">
-                <a:solidFill>
-                  <a:schemeClr val="accent1"/>
-                </a:solidFill>
-              </a:defRPr>
+            <a:lvl1pPr>
+              <a:defRPr sz="1800"/>
             </a:lvl1pPr>
-            <a:lvl2pPr marL="457200" indent="0">
-              <a:buNone/>
-              <a:defRPr sz="2000" b="1"/>
+            <a:lvl2pPr>
+              <a:defRPr sz="1500"/>
             </a:lvl2pPr>
-            <a:lvl3pPr marL="914400" indent="0">
-              <a:buNone/>
-              <a:defRPr sz="1800" b="1"/>
+            <a:lvl3pPr>
+              <a:defRPr sz="1350"/>
             </a:lvl3pPr>
-            <a:lvl4pPr marL="1371600" indent="0">
-              <a:buNone/>
-              <a:defRPr sz="1600" b="1"/>
+            <a:lvl4pPr>
+              <a:defRPr sz="1200"/>
             </a:lvl4pPr>
-            <a:lvl5pPr marL="1828800" indent="0">
-              <a:buNone/>
-              <a:defRPr sz="1600" b="1"/>
+            <a:lvl5pPr>
+              <a:defRPr sz="1200"/>
             </a:lvl5pPr>
-            <a:lvl6pPr marL="2286000" indent="0">
-              <a:buNone/>
-              <a:defRPr sz="1600" b="1"/>
+            <a:lvl6pPr>
+              <a:defRPr sz="1200"/>
             </a:lvl6pPr>
-            <a:lvl7pPr marL="2743200" indent="0">
-              <a:buNone/>
-              <a:defRPr sz="1600" b="1"/>
+            <a:lvl7pPr>
+              <a:defRPr sz="1200"/>
             </a:lvl7pPr>
-            <a:lvl8pPr marL="3200400" indent="0">
-              <a:buNone/>
-              <a:defRPr sz="1600" b="1"/>
+            <a:lvl8pPr>
+              <a:defRPr sz="1200"/>
             </a:lvl8pPr>
-            <a:lvl9pPr marL="3657600" indent="0">
-              <a:buNone/>
-              <a:defRPr sz="1600" b="1"/>
+            <a:lvl9pPr>
+              <a:defRPr sz="1200"/>
             </a:lvl9pPr>
           </a:lstStyle>
           <a:p>
             <a:pPr lvl="0"/>
             <a:r>
-              <a:rPr lang="ja-JP" altLang="en-US"/>
-              <a:t>マスター テキストの書式設定</a:t>
-            </a:r>
-          </a:p>
-        </p:txBody>
-      </p:sp>
-      <p:sp>
-        <p:nvSpPr>
-          <p:cNvPr id="6" name="Content Placeholder 5"/>
-          <p:cNvSpPr>
-            <a:spLocks noGrp="1"/>
-          </p:cNvSpPr>
-          <p:nvPr>
-            <p:ph sz="quarter" idx="4"/>
-          </p:nvPr>
-        </p:nvSpPr>
-        <p:spPr>
-          <a:xfrm>
-            <a:off x="6412362" y="2821491"/>
-            <a:ext cx="4645152" cy="2637371"/>
-          </a:xfrm>
-        </p:spPr>
-        <p:txBody>
-          <a:bodyPr/>
-          <a:lstStyle/>
-          <a:p>
-            <a:pPr lvl="0"/>
-            <a:r>
-              <a:rPr lang="ja-JP" altLang="en-US"/>
-              <a:t>マスター テキストの書式設定</a:t>
+              <a:rPr lang="en-US"/>
+              <a:t>Click to edit Master text styles</a:t>
             </a:r>
           </a:p>
           <a:p>
             <a:pPr lvl="1"/>
             <a:r>
-              <a:rPr lang="ja-JP" altLang="en-US"/>
-              <a:t>第 </a:t>
-            </a:r>
-            <a:r>
-              <a:rPr lang="en-US" altLang="ja-JP"/>
-              <a:t>2 </a:t>
-            </a:r>
-            <a:r>
-              <a:rPr lang="ja-JP" altLang="en-US"/>
-              <a:t>レベル</a:t>
+              <a:rPr lang="en-US"/>
+              <a:t>Second level</a:t>
             </a:r>
           </a:p>
           <a:p>
             <a:pPr lvl="2"/>
             <a:r>
-              <a:rPr lang="ja-JP" altLang="en-US"/>
-              <a:t>第 </a:t>
-            </a:r>
-            <a:r>
-              <a:rPr lang="en-US" altLang="ja-JP"/>
-              <a:t>3 </a:t>
-            </a:r>
-            <a:r>
-              <a:rPr lang="ja-JP" altLang="en-US"/>
-              <a:t>レベル</a:t>
+              <a:rPr lang="en-US"/>
+              <a:t>Third level</a:t>
             </a:r>
           </a:p>
           <a:p>
             <a:pPr lvl="3"/>
             <a:r>
-              <a:rPr lang="ja-JP" altLang="en-US"/>
-              <a:t>第 </a:t>
-            </a:r>
-            <a:r>
-              <a:rPr lang="en-US" altLang="ja-JP"/>
-              <a:t>4 </a:t>
-            </a:r>
-            <a:r>
-              <a:rPr lang="ja-JP" altLang="en-US"/>
-              <a:t>レベル</a:t>
+              <a:rPr lang="en-US"/>
+              <a:t>Fourth level</a:t>
             </a:r>
           </a:p>
           <a:p>
             <a:pPr lvl="4"/>
             <a:r>
-              <a:rPr lang="ja-JP" altLang="en-US"/>
-              <a:t>第 </a:t>
-            </a:r>
-            <a:r>
-              <a:rPr lang="en-US" altLang="ja-JP"/>
-              <a:t>5 </a:t>
-            </a:r>
-            <a:r>
-              <a:rPr lang="ja-JP" altLang="en-US"/>
-              <a:t>レベル</a:t>
-            </a:r>
-            <a:endParaRPr lang="en-US" dirty="0"/>
+              <a:rPr lang="en-US"/>
+              <a:t>Fifth level</a:t>
+            </a:r>
           </a:p>
         </p:txBody>
       </p:sp>
@@ -2033,11 +1768,11 @@
           <a:bodyPr/>
           <a:lstStyle/>
           <a:p>
-            <a:fld id="{48A87A34-81AB-432B-8DAE-1953F412C126}" type="datetimeFigureOut">
-              <a:rPr lang="en-US" dirty="0"/>
-              <a:t>3/26/26</a:t>
+            <a:fld id="{241EB5C9-1307-BA42-ABA2-0BC069CD8E7F}" type="datetimeFigureOut">
+              <a:rPr lang="en-US" smtClean="0"/>
+              <a:t>1/2/22</a:t>
             </a:fld>
-            <a:endParaRPr lang="en-US" dirty="0"/>
+            <a:endParaRPr lang="en-US"/>
           </a:p>
         </p:txBody>
       </p:sp>
@@ -2056,7 +1791,7 @@
           <a:bodyPr/>
           <a:lstStyle/>
           <a:p>
-            <a:endParaRPr lang="en-US" dirty="0"/>
+            <a:endParaRPr lang="en-US"/>
           </a:p>
         </p:txBody>
       </p:sp>
@@ -2075,46 +1810,20 @@
           <a:bodyPr/>
           <a:lstStyle/>
           <a:p>
-            <a:fld id="{6D22F896-40B5-4ADD-8801-0D06FADFA095}" type="slidenum">
-              <a:rPr lang="en-US" dirty="0"/>
+            <a:fld id="{C5EF2332-01BF-834F-8236-50238282D533}" type="slidenum">
+              <a:rPr lang="en-US" smtClean="0"/>
               <a:t>‹#›</a:t>
             </a:fld>
-            <a:endParaRPr lang="en-US" dirty="0"/>
-          </a:p>
-        </p:txBody>
-      </p:sp>
-      <p:cxnSp>
-        <p:nvCxnSpPr>
-          <p:cNvPr id="29" name="Straight Connector 28"/>
-          <p:cNvCxnSpPr/>
-          <p:nvPr/>
-        </p:nvCxnSpPr>
-        <p:spPr>
-          <a:xfrm>
-            <a:off x="1453896" y="1847088"/>
-            <a:ext cx="9607522" cy="0"/>
-          </a:xfrm>
-          <a:prstGeom prst="line">
-            <a:avLst/>
-          </a:prstGeom>
-          <a:ln w="31750"/>
-        </p:spPr>
-        <p:style>
-          <a:lnRef idx="3">
-            <a:schemeClr val="accent1"/>
-          </a:lnRef>
-          <a:fillRef idx="0">
-            <a:schemeClr val="accent1"/>
-          </a:fillRef>
-          <a:effectRef idx="2">
-            <a:schemeClr val="accent1"/>
-          </a:effectRef>
-          <a:fontRef idx="minor">
-            <a:schemeClr val="tx1"/>
-          </a:fontRef>
-        </p:style>
-      </p:cxnSp>
+            <a:endParaRPr lang="en-US"/>
+          </a:p>
+        </p:txBody>
+      </p:sp>
     </p:spTree>
+    <p:extLst>
+      <p:ext uri="{BB962C8B-B14F-4D97-AF65-F5344CB8AC3E}">
+        <p14:creationId xmlns:p14="http://schemas.microsoft.com/office/powerpoint/2010/main" val="2535793967"/>
+      </p:ext>
+    </p:extLst>
   </p:cSld>
   <p:clrMapOvr>
     <a:masterClrMapping/>
@@ -2124,7 +1833,7 @@
 
 <file path=ppt/slideLayouts/slideLayout6.xml><?xml version="1.0" encoding="utf-8"?>
 <p:sldLayout xmlns:a="http://schemas.openxmlformats.org/drawingml/2006/main" xmlns:r="http://schemas.openxmlformats.org/officeDocument/2006/relationships" xmlns:p="http://schemas.openxmlformats.org/presentationml/2006/main" type="titleOnly" preserve="1">
-  <p:cSld name="タイトルのみ">
+  <p:cSld name="Title Only">
     <p:spTree>
       <p:nvGrpSpPr>
         <p:cNvPr id="1" name=""/>
@@ -2155,10 +1864,9 @@
           <a:lstStyle/>
           <a:p>
             <a:r>
-              <a:rPr lang="ja-JP" altLang="en-US"/>
-              <a:t>マスター タイトルの書式設定</a:t>
-            </a:r>
-            <a:endParaRPr lang="en-US" dirty="0"/>
+              <a:rPr lang="en-US"/>
+              <a:t>Click to edit Master title style</a:t>
+            </a:r>
           </a:p>
         </p:txBody>
       </p:sp>
@@ -2177,11 +1885,11 @@
           <a:bodyPr/>
           <a:lstStyle/>
           <a:p>
-            <a:fld id="{48A87A34-81AB-432B-8DAE-1953F412C126}" type="datetimeFigureOut">
-              <a:rPr lang="en-US" dirty="0"/>
-              <a:t>3/26/26</a:t>
+            <a:fld id="{241EB5C9-1307-BA42-ABA2-0BC069CD8E7F}" type="datetimeFigureOut">
+              <a:rPr lang="en-US" smtClean="0"/>
+              <a:t>1/2/22</a:t>
             </a:fld>
-            <a:endParaRPr lang="en-US" dirty="0"/>
+            <a:endParaRPr lang="en-US"/>
           </a:p>
         </p:txBody>
       </p:sp>
@@ -2200,7 +1908,7 @@
           <a:bodyPr/>
           <a:lstStyle/>
           <a:p>
-            <a:endParaRPr lang="en-US" dirty="0"/>
+            <a:endParaRPr lang="en-US"/>
           </a:p>
         </p:txBody>
       </p:sp>
@@ -2219,46 +1927,20 @@
           <a:bodyPr/>
           <a:lstStyle/>
           <a:p>
-            <a:fld id="{6D22F896-40B5-4ADD-8801-0D06FADFA095}" type="slidenum">
-              <a:rPr lang="en-US" dirty="0"/>
+            <a:fld id="{C5EF2332-01BF-834F-8236-50238282D533}" type="slidenum">
+              <a:rPr lang="en-US" smtClean="0"/>
               <a:t>‹#›</a:t>
             </a:fld>
-            <a:endParaRPr lang="en-US" dirty="0"/>
-          </a:p>
-        </p:txBody>
-      </p:sp>
-      <p:cxnSp>
-        <p:nvCxnSpPr>
-          <p:cNvPr id="25" name="Straight Connector 24"/>
-          <p:cNvCxnSpPr/>
-          <p:nvPr/>
-        </p:nvCxnSpPr>
-        <p:spPr>
-          <a:xfrm>
-            <a:off x="1453896" y="1847088"/>
-            <a:ext cx="9607522" cy="0"/>
-          </a:xfrm>
-          <a:prstGeom prst="line">
-            <a:avLst/>
-          </a:prstGeom>
-          <a:ln w="31750"/>
-        </p:spPr>
-        <p:style>
-          <a:lnRef idx="3">
-            <a:schemeClr val="accent1"/>
-          </a:lnRef>
-          <a:fillRef idx="0">
-            <a:schemeClr val="accent1"/>
-          </a:fillRef>
-          <a:effectRef idx="2">
-            <a:schemeClr val="accent1"/>
-          </a:effectRef>
-          <a:fontRef idx="minor">
-            <a:schemeClr val="tx1"/>
-          </a:fontRef>
-        </p:style>
-      </p:cxnSp>
+            <a:endParaRPr lang="en-US"/>
+          </a:p>
+        </p:txBody>
+      </p:sp>
     </p:spTree>
+    <p:extLst>
+      <p:ext uri="{BB962C8B-B14F-4D97-AF65-F5344CB8AC3E}">
+        <p14:creationId xmlns:p14="http://schemas.microsoft.com/office/powerpoint/2010/main" val="3472721253"/>
+      </p:ext>
+    </p:extLst>
   </p:cSld>
   <p:clrMapOvr>
     <a:masterClrMapping/>
@@ -2638,7 +2320,7 @@
 
 <file path=ppt/slideLayouts/slideLayout9.xml><?xml version="1.0" encoding="utf-8"?>
 <p:sldLayout xmlns:a="http://schemas.openxmlformats.org/drawingml/2006/main" xmlns:r="http://schemas.openxmlformats.org/officeDocument/2006/relationships" xmlns:p="http://schemas.openxmlformats.org/presentationml/2006/main" type="picTx" preserve="1">
-  <p:cSld name="タイトル付きの図">
+  <p:cSld name="Picture with Caption">
     <p:spTree>
       <p:nvGrpSpPr>
         <p:cNvPr id="1" name=""/>
@@ -2653,140 +2335,6 @@
           <a:chExt cx="0" cy="0"/>
         </a:xfrm>
       </p:grpSpPr>
-      <p:grpSp>
-        <p:nvGrpSpPr>
-          <p:cNvPr id="8" name="Group 7"/>
-          <p:cNvGrpSpPr/>
-          <p:nvPr/>
-        </p:nvGrpSpPr>
-        <p:grpSpPr>
-          <a:xfrm>
-            <a:off x="7477387" y="482170"/>
-            <a:ext cx="4074533" cy="5149101"/>
-            <a:chOff x="7477387" y="482170"/>
-            <a:chExt cx="4074533" cy="5149101"/>
-          </a:xfrm>
-        </p:grpSpPr>
-        <p:sp>
-          <p:nvSpPr>
-            <p:cNvPr id="18" name="Rectangle 17"/>
-            <p:cNvSpPr/>
-            <p:nvPr/>
-          </p:nvSpPr>
-          <p:spPr bwMode="black">
-            <a:xfrm>
-              <a:off x="7477387" y="482170"/>
-              <a:ext cx="4074533" cy="5149101"/>
-            </a:xfrm>
-            <a:prstGeom prst="rect">
-              <a:avLst/>
-            </a:prstGeom>
-            <a:gradFill>
-              <a:gsLst>
-                <a:gs pos="0">
-                  <a:srgbClr val="000001"/>
-                </a:gs>
-                <a:gs pos="100000">
-                  <a:srgbClr val="191919"/>
-                </a:gs>
-              </a:gsLst>
-            </a:gradFill>
-            <a:ln w="76200" cmpd="sng">
-              <a:noFill/>
-              <a:miter lim="800000"/>
-            </a:ln>
-            <a:effectLst>
-              <a:outerShdw blurRad="127000" dist="228600" dir="4740000" sx="98000" sy="98000" algn="tl" rotWithShape="0">
-                <a:srgbClr val="000000">
-                  <a:alpha val="34000"/>
-                </a:srgbClr>
-              </a:outerShdw>
-            </a:effectLst>
-            <a:scene3d>
-              <a:camera prst="orthographicFront"/>
-              <a:lightRig rig="threePt" dir="t"/>
-            </a:scene3d>
-            <a:sp3d>
-              <a:bevelT w="152400" h="50800" prst="softRound"/>
-            </a:sp3d>
-          </p:spPr>
-          <p:style>
-            <a:lnRef idx="1">
-              <a:schemeClr val="accent1"/>
-            </a:lnRef>
-            <a:fillRef idx="3">
-              <a:schemeClr val="accent1"/>
-            </a:fillRef>
-            <a:effectRef idx="2">
-              <a:schemeClr val="accent1"/>
-            </a:effectRef>
-            <a:fontRef idx="minor">
-              <a:schemeClr val="lt1"/>
-            </a:fontRef>
-          </p:style>
-        </p:sp>
-        <p:sp>
-          <p:nvSpPr>
-            <p:cNvPr id="19" name="Rectangle 18"/>
-            <p:cNvSpPr/>
-            <p:nvPr/>
-          </p:nvSpPr>
-          <p:spPr bwMode="blackWhite">
-            <a:xfrm>
-              <a:off x="7790446" y="812506"/>
-              <a:ext cx="3450289" cy="4466452"/>
-            </a:xfrm>
-            <a:prstGeom prst="rect">
-              <a:avLst/>
-            </a:prstGeom>
-            <a:gradFill>
-              <a:gsLst>
-                <a:gs pos="0">
-                  <a:srgbClr val="DADADA"/>
-                </a:gs>
-                <a:gs pos="100000">
-                  <a:srgbClr val="FFFFFE"/>
-                </a:gs>
-              </a:gsLst>
-              <a:lin ang="16200000" scaled="0"/>
-            </a:gradFill>
-            <a:ln w="50800" cmpd="sng">
-              <a:solidFill>
-                <a:srgbClr val="191919"/>
-              </a:solidFill>
-              <a:miter lim="800000"/>
-            </a:ln>
-            <a:effectLst>
-              <a:innerShdw blurRad="63500" dist="88900" dir="14100000">
-                <a:srgbClr val="000000">
-                  <a:alpha val="30000"/>
-                </a:srgbClr>
-              </a:innerShdw>
-            </a:effectLst>
-            <a:scene3d>
-              <a:camera prst="orthographicFront"/>
-              <a:lightRig rig="threePt" dir="t"/>
-            </a:scene3d>
-            <a:sp3d>
-              <a:bevelT prst="relaxedInset"/>
-            </a:sp3d>
-          </p:spPr>
-          <p:style>
-            <a:lnRef idx="1">
-              <a:schemeClr val="accent1"/>
-            </a:lnRef>
-            <a:fillRef idx="3">
-              <a:schemeClr val="accent1"/>
-            </a:fillRef>
-            <a:effectRef idx="2">
-              <a:schemeClr val="accent1"/>
-            </a:effectRef>
-            <a:fontRef idx="minor">
-              <a:schemeClr val="lt1"/>
-            </a:fontRef>
-          </p:style>
-        </p:sp>
-      </p:grpSp>
       <p:sp>
         <p:nvSpPr>
           <p:cNvPr id="2" name="Title 1"/>
@@ -2799,25 +2347,22 @@
         </p:nvSpPr>
         <p:spPr>
           <a:xfrm>
-            <a:off x="1451206" y="1129513"/>
-            <a:ext cx="5532328" cy="1830584"/>
+            <a:off x="1792288" y="3600450"/>
+            <a:ext cx="5486400" cy="425054"/>
           </a:xfrm>
         </p:spPr>
         <p:txBody>
-          <a:bodyPr anchor="b">
-            <a:normAutofit/>
-          </a:bodyPr>
+          <a:bodyPr anchor="b"/>
           <a:lstStyle>
-            <a:lvl1pPr>
-              <a:defRPr sz="3200"/>
+            <a:lvl1pPr algn="l">
+              <a:defRPr sz="1500" b="1"/>
             </a:lvl1pPr>
           </a:lstStyle>
           <a:p>
             <a:r>
-              <a:rPr lang="ja-JP" altLang="en-US"/>
-              <a:t>マスター タイトルの書式設定</a:t>
-            </a:r>
-            <a:endParaRPr lang="en-US" dirty="0"/>
+              <a:rPr lang="en-US"/>
+              <a:t>Click to edit Master title style</a:t>
+            </a:r>
           </a:p>
         </p:txBody>
       </p:sp>
@@ -2825,7 +2370,7 @@
         <p:nvSpPr>
           <p:cNvPr id="3" name="Picture Placeholder 2"/>
           <p:cNvSpPr>
-            <a:spLocks noGrp="1" noChangeAspect="1"/>
+            <a:spLocks noGrp="1"/>
           </p:cNvSpPr>
           <p:nvPr>
             <p:ph type="pic" idx="1"/>
@@ -2833,66 +2378,52 @@
         </p:nvSpPr>
         <p:spPr>
           <a:xfrm>
-            <a:off x="8124389" y="1122542"/>
-            <a:ext cx="2791171" cy="3866327"/>
+            <a:off x="1792288" y="459581"/>
+            <a:ext cx="5486400" cy="3086100"/>
           </a:xfrm>
-          <a:solidFill>
-            <a:schemeClr val="bg1">
-              <a:lumMod val="85000"/>
-            </a:schemeClr>
-          </a:solidFill>
-          <a:ln w="9525" cap="sq">
-            <a:noFill/>
-            <a:miter lim="800000"/>
-          </a:ln>
-          <a:effectLst/>
         </p:spPr>
         <p:txBody>
-          <a:bodyPr anchor="t"/>
+          <a:bodyPr/>
           <a:lstStyle>
-            <a:lvl1pPr marL="0" indent="0" algn="ctr">
-              <a:buNone/>
-              <a:defRPr sz="3200"/>
+            <a:lvl1pPr marL="0" indent="0">
+              <a:buNone/>
+              <a:defRPr sz="2400"/>
             </a:lvl1pPr>
-            <a:lvl2pPr marL="457200" indent="0">
-              <a:buNone/>
-              <a:defRPr sz="2800"/>
+            <a:lvl2pPr marL="342900" indent="0">
+              <a:buNone/>
+              <a:defRPr sz="2100"/>
             </a:lvl2pPr>
-            <a:lvl3pPr marL="914400" indent="0">
-              <a:buNone/>
-              <a:defRPr sz="2400"/>
+            <a:lvl3pPr marL="685800" indent="0">
+              <a:buNone/>
+              <a:defRPr sz="1800"/>
             </a:lvl3pPr>
-            <a:lvl4pPr marL="1371600" indent="0">
-              <a:buNone/>
-              <a:defRPr sz="2000"/>
+            <a:lvl4pPr marL="1028700" indent="0">
+              <a:buNone/>
+              <a:defRPr sz="1500"/>
             </a:lvl4pPr>
-            <a:lvl5pPr marL="1828800" indent="0">
-              <a:buNone/>
-              <a:defRPr sz="2000"/>
+            <a:lvl5pPr marL="1371600" indent="0">
+              <a:buNone/>
+              <a:defRPr sz="1500"/>
             </a:lvl5pPr>
-            <a:lvl6pPr marL="2286000" indent="0">
-              <a:buNone/>
-              <a:defRPr sz="2000"/>
+            <a:lvl6pPr marL="1714500" indent="0">
+              <a:buNone/>
+              <a:defRPr sz="1500"/>
             </a:lvl6pPr>
-            <a:lvl7pPr marL="2743200" indent="0">
-              <a:buNone/>
-              <a:defRPr sz="2000"/>
+            <a:lvl7pPr marL="2057400" indent="0">
+              <a:buNone/>
+              <a:defRPr sz="1500"/>
             </a:lvl7pPr>
-            <a:lvl8pPr marL="3200400" indent="0">
-              <a:buNone/>
-              <a:defRPr sz="2000"/>
+            <a:lvl8pPr marL="2400300" indent="0">
+              <a:buNone/>
+              <a:defRPr sz="1500"/>
             </a:lvl8pPr>
-            <a:lvl9pPr marL="3657600" indent="0">
-              <a:buNone/>
-              <a:defRPr sz="2000"/>
+            <a:lvl9pPr marL="2743200" indent="0">
+              <a:buNone/>
+              <a:defRPr sz="1500"/>
             </a:lvl9pPr>
           </a:lstStyle>
           <a:p>
-            <a:r>
-              <a:rPr lang="ja-JP" altLang="en-US"/>
-              <a:t>アイコンをクリックして図を追加</a:t>
-            </a:r>
-            <a:endParaRPr lang="en-US" dirty="0"/>
+            <a:endParaRPr lang="en-US"/>
           </a:p>
         </p:txBody>
       </p:sp>
@@ -2908,57 +2439,55 @@
         </p:nvSpPr>
         <p:spPr>
           <a:xfrm>
-            <a:off x="1450329" y="3145992"/>
-            <a:ext cx="5524404" cy="2003742"/>
+            <a:off x="1792288" y="4025503"/>
+            <a:ext cx="5486400" cy="603647"/>
           </a:xfrm>
         </p:spPr>
         <p:txBody>
-          <a:bodyPr>
-            <a:normAutofit/>
-          </a:bodyPr>
+          <a:bodyPr/>
           <a:lstStyle>
-            <a:lvl1pPr marL="0" indent="0" algn="l">
-              <a:buNone/>
-              <a:defRPr sz="1800"/>
+            <a:lvl1pPr marL="0" indent="0">
+              <a:buNone/>
+              <a:defRPr sz="1050"/>
             </a:lvl1pPr>
-            <a:lvl2pPr marL="457200" indent="0">
-              <a:buNone/>
-              <a:defRPr sz="1400"/>
+            <a:lvl2pPr marL="342900" indent="0">
+              <a:buNone/>
+              <a:defRPr sz="900"/>
             </a:lvl2pPr>
-            <a:lvl3pPr marL="914400" indent="0">
-              <a:buNone/>
-              <a:defRPr sz="1200"/>
+            <a:lvl3pPr marL="685800" indent="0">
+              <a:buNone/>
+              <a:defRPr sz="750"/>
             </a:lvl3pPr>
-            <a:lvl4pPr marL="1371600" indent="0">
-              <a:buNone/>
-              <a:defRPr sz="1000"/>
+            <a:lvl4pPr marL="1028700" indent="0">
+              <a:buNone/>
+              <a:defRPr sz="675"/>
             </a:lvl4pPr>
-            <a:lvl5pPr marL="1828800" indent="0">
-              <a:buNone/>
-              <a:defRPr sz="1000"/>
+            <a:lvl5pPr marL="1371600" indent="0">
+              <a:buNone/>
+              <a:defRPr sz="675"/>
             </a:lvl5pPr>
-            <a:lvl6pPr marL="2286000" indent="0">
-              <a:buNone/>
-              <a:defRPr sz="1000"/>
+            <a:lvl6pPr marL="1714500" indent="0">
+              <a:buNone/>
+              <a:defRPr sz="675"/>
             </a:lvl6pPr>
-            <a:lvl7pPr marL="2743200" indent="0">
-              <a:buNone/>
-              <a:defRPr sz="1000"/>
+            <a:lvl7pPr marL="2057400" indent="0">
+              <a:buNone/>
+              <a:defRPr sz="675"/>
             </a:lvl7pPr>
-            <a:lvl8pPr marL="3200400" indent="0">
-              <a:buNone/>
-              <a:defRPr sz="1000"/>
+            <a:lvl8pPr marL="2400300" indent="0">
+              <a:buNone/>
+              <a:defRPr sz="675"/>
             </a:lvl8pPr>
-            <a:lvl9pPr marL="3657600" indent="0">
-              <a:buNone/>
-              <a:defRPr sz="1000"/>
+            <a:lvl9pPr marL="2743200" indent="0">
+              <a:buNone/>
+              <a:defRPr sz="675"/>
             </a:lvl9pPr>
           </a:lstStyle>
           <a:p>
             <a:pPr lvl="0"/>
             <a:r>
-              <a:rPr lang="ja-JP" altLang="en-US"/>
-              <a:t>マスター テキストの書式設定</a:t>
+              <a:rPr lang="en-US"/>
+              <a:t>Click to edit Master text styles</a:t>
             </a:r>
           </a:p>
         </p:txBody>
@@ -2973,26 +2502,16 @@
             <p:ph type="dt" sz="half" idx="10"/>
           </p:nvPr>
         </p:nvSpPr>
-        <p:spPr>
-          <a:xfrm>
-            <a:off x="1447382" y="5469856"/>
-            <a:ext cx="5527351" cy="320123"/>
-          </a:xfrm>
-        </p:spPr>
-        <p:txBody>
-          <a:bodyPr/>
-          <a:lstStyle>
-            <a:lvl1pPr algn="l">
-              <a:defRPr/>
-            </a:lvl1pPr>
-          </a:lstStyle>
-          <a:p>
-            <a:fld id="{48A87A34-81AB-432B-8DAE-1953F412C126}" type="datetimeFigureOut">
-              <a:rPr lang="en-US" dirty="0"/>
-              <a:pPr/>
-              <a:t>3/26/26</a:t>
+        <p:spPr/>
+        <p:txBody>
+          <a:bodyPr/>
+          <a:lstStyle/>
+          <a:p>
+            <a:fld id="{241EB5C9-1307-BA42-ABA2-0BC069CD8E7F}" type="datetimeFigureOut">
+              <a:rPr lang="en-US" smtClean="0"/>
+              <a:t>1/2/22</a:t>
             </a:fld>
-            <a:endParaRPr lang="en-US" dirty="0"/>
+            <a:endParaRPr lang="en-US"/>
           </a:p>
         </p:txBody>
       </p:sp>
@@ -3006,17 +2525,12 @@
             <p:ph type="ftr" sz="quarter" idx="11"/>
           </p:nvPr>
         </p:nvSpPr>
-        <p:spPr>
-          <a:xfrm>
-            <a:off x="1447382" y="318640"/>
-            <a:ext cx="5541004" cy="320931"/>
-          </a:xfrm>
-        </p:spPr>
-        <p:txBody>
-          <a:bodyPr/>
-          <a:lstStyle/>
-          <a:p>
-            <a:endParaRPr lang="en-US" dirty="0"/>
+        <p:spPr/>
+        <p:txBody>
+          <a:bodyPr/>
+          <a:lstStyle/>
+          <a:p>
+            <a:endParaRPr lang="en-US"/>
           </a:p>
         </p:txBody>
       </p:sp>
@@ -3035,46 +2549,20 @@
           <a:bodyPr/>
           <a:lstStyle/>
           <a:p>
-            <a:fld id="{6D22F896-40B5-4ADD-8801-0D06FADFA095}" type="slidenum">
-              <a:rPr lang="en-US" dirty="0"/>
+            <a:fld id="{C5EF2332-01BF-834F-8236-50238282D533}" type="slidenum">
+              <a:rPr lang="en-US" smtClean="0"/>
               <a:t>‹#›</a:t>
             </a:fld>
-            <a:endParaRPr lang="en-US" dirty="0"/>
-          </a:p>
-        </p:txBody>
-      </p:sp>
-      <p:cxnSp>
-        <p:nvCxnSpPr>
-          <p:cNvPr id="31" name="Straight Connector 30"/>
-          <p:cNvCxnSpPr/>
-          <p:nvPr/>
-        </p:nvCxnSpPr>
-        <p:spPr>
-          <a:xfrm>
-            <a:off x="1447382" y="3143605"/>
-            <a:ext cx="5527351" cy="0"/>
-          </a:xfrm>
-          <a:prstGeom prst="line">
-            <a:avLst/>
-          </a:prstGeom>
-          <a:ln w="31750"/>
-        </p:spPr>
-        <p:style>
-          <a:lnRef idx="3">
-            <a:schemeClr val="accent1"/>
-          </a:lnRef>
-          <a:fillRef idx="0">
-            <a:schemeClr val="accent1"/>
-          </a:fillRef>
-          <a:effectRef idx="2">
-            <a:schemeClr val="accent1"/>
-          </a:effectRef>
-          <a:fontRef idx="minor">
-            <a:schemeClr val="tx1"/>
-          </a:fontRef>
-        </p:style>
-      </p:cxnSp>
+            <a:endParaRPr lang="en-US"/>
+          </a:p>
+        </p:txBody>
+      </p:sp>
     </p:spTree>
+    <p:extLst>
+      <p:ext uri="{BB962C8B-B14F-4D97-AF65-F5344CB8AC3E}">
+        <p14:creationId xmlns:p14="http://schemas.microsoft.com/office/powerpoint/2010/main" val="3566899855"/>
+      </p:ext>
+    </p:extLst>
   </p:cSld>
   <p:clrMapOvr>
     <a:masterClrMapping/>
@@ -3086,8 +2574,8 @@
 <p:sldMaster xmlns:a="http://schemas.openxmlformats.org/drawingml/2006/main" xmlns:p="http://schemas.openxmlformats.org/presentationml/2006/main" xmlns:r="http://schemas.openxmlformats.org/officeDocument/2006/relationships">
   <p:cSld>
     <p:bg>
-      <p:bgRef idx="1003">
-        <a:schemeClr val="bg2"/>
+      <p:bgRef idx="1001">
+        <a:schemeClr val="bg1"/>
       </p:bgRef>
     </p:bg>
     <p:spTree>
@@ -3106,233 +2594,121 @@
       </p:grpSpPr>
       <p:sp>
         <p:nvSpPr>
-          <p:cNvPr id="8" name="Rectangle 7"/>
-          <p:cNvSpPr/>
-          <p:nvPr/>
+          <p:cNvPr id="2" name="Title Placeholder 1"/>
+          <p:cNvSpPr>
+            <a:spLocks noGrp="1"/>
+          </p:cNvSpPr>
+          <p:nvPr>
+            <p:ph type="title"/>
+          </p:nvPr>
         </p:nvSpPr>
         <p:spPr>
           <a:xfrm>
-            <a:off x="0" y="2019476"/>
-            <a:ext cx="12192000" cy="4105941"/>
-          </a:xfrm>
-          <a:prstGeom prst="rect">
-            <a:avLst/>
-          </a:prstGeom>
-          <a:gradFill flip="none" rotWithShape="1">
-            <a:gsLst>
-              <a:gs pos="0">
-                <a:schemeClr val="bg2">
-                  <a:alpha val="0"/>
-                </a:schemeClr>
-              </a:gs>
-              <a:gs pos="100000">
-                <a:schemeClr val="bg2"/>
-              </a:gs>
-            </a:gsLst>
-            <a:lin ang="5400000" scaled="0"/>
-            <a:tileRect/>
-          </a:gradFill>
-          <a:ln>
-            <a:noFill/>
-          </a:ln>
-        </p:spPr>
-        <p:style>
-          <a:lnRef idx="2">
-            <a:schemeClr val="accent1">
-              <a:shade val="50000"/>
-            </a:schemeClr>
-          </a:lnRef>
-          <a:fillRef idx="1">
-            <a:schemeClr val="accent1"/>
-          </a:fillRef>
-          <a:effectRef idx="0">
-            <a:schemeClr val="accent1"/>
-          </a:effectRef>
-          <a:fontRef idx="minor">
-            <a:schemeClr val="lt1"/>
-          </a:fontRef>
-        </p:style>
-      </p:sp>
-      <p:pic>
-        <p:nvPicPr>
-          <p:cNvPr id="7" name="Picture 6"/>
-          <p:cNvPicPr>
-            <a:picLocks noChangeAspect="1"/>
-          </p:cNvPicPr>
-          <p:nvPr/>
-        </p:nvPicPr>
-        <p:blipFill rotWithShape="1">
-          <a:blip r:embed="rId13">
-            <a:extLst>
-              <a:ext uri="{28A0092B-C50C-407E-A947-70E740481C1C}">
-                <a14:useLocalDpi xmlns:a14="http://schemas.microsoft.com/office/drawing/2010/main" val="0"/>
-              </a:ext>
-            </a:extLst>
-          </a:blip>
-          <a:srcRect b="-1538" t="1538"/>
-          <a:stretch/>
-        </p:blipFill>
-        <p:spPr bwMode="black">
-          <a:xfrm>
-            <a:off x="0" y="6126480"/>
-            <a:ext cx="12192000" cy="742950"/>
+            <a:off x="457200" y="205979"/>
+            <a:ext cx="8229600" cy="857250"/>
           </a:xfrm>
           <a:prstGeom prst="rect">
             <a:avLst/>
           </a:prstGeom>
         </p:spPr>
-      </p:pic>
-      <p:sp>
-        <p:nvSpPr>
-          <p:cNvPr id="2" name="Title Placeholder 1"/>
-          <p:cNvSpPr>
-            <a:spLocks noGrp="1"/>
-          </p:cNvSpPr>
-          <p:nvPr>
-            <p:ph type="title"/>
+        <p:txBody>
+          <a:bodyPr anchor="ctr" bIns="45720" lIns="91440" rIns="91440" rtlCol="0" tIns="45720" vert="horz">
+            <a:normAutofit/>
+          </a:bodyPr>
+          <a:lstStyle/>
+          <a:p>
+            <a:r>
+              <a:rPr lang="en-US"/>
+              <a:t>Click to edit Master title style</a:t>
+            </a:r>
+          </a:p>
+        </p:txBody>
+      </p:sp>
+      <p:sp>
+        <p:nvSpPr>
+          <p:cNvPr id="3" name="Text Placeholder 2"/>
+          <p:cNvSpPr>
+            <a:spLocks noGrp="1"/>
+          </p:cNvSpPr>
+          <p:nvPr>
+            <p:ph idx="1" type="body"/>
           </p:nvPr>
         </p:nvSpPr>
         <p:spPr>
           <a:xfrm>
-            <a:off x="1451579" y="804519"/>
-            <a:ext cx="9603275" cy="1049235"/>
+            <a:off x="457200" y="1200151"/>
+            <a:ext cx="8229600" cy="3394472"/>
           </a:xfrm>
           <a:prstGeom prst="rect">
             <a:avLst/>
           </a:prstGeom>
         </p:spPr>
         <p:txBody>
-          <a:bodyPr anchor="t" bIns="45720" lIns="91440" rIns="91440" rtlCol="0" tIns="45720" vert="horz">
+          <a:bodyPr bIns="45720" lIns="91440" rIns="91440" rtlCol="0" tIns="45720" vert="horz">
             <a:normAutofit/>
           </a:bodyPr>
           <a:lstStyle/>
           <a:p>
-            <a:r>
-              <a:rPr altLang="en-US" lang="ja-JP"/>
-              <a:t>マスター タイトルの書式設定</a:t>
-            </a:r>
-            <a:endParaRPr dirty="0" lang="en-US"/>
-          </a:p>
-        </p:txBody>
-      </p:sp>
-      <p:sp>
-        <p:nvSpPr>
-          <p:cNvPr id="3" name="Text Placeholder 2"/>
-          <p:cNvSpPr>
-            <a:spLocks noGrp="1"/>
-          </p:cNvSpPr>
-          <p:nvPr>
-            <p:ph idx="1" type="body"/>
+            <a:pPr lvl="0"/>
+            <a:r>
+              <a:rPr lang="en-US"/>
+              <a:t>Click to edit Master text styles</a:t>
+            </a:r>
+          </a:p>
+          <a:p>
+            <a:pPr lvl="1"/>
+            <a:r>
+              <a:rPr lang="en-US"/>
+              <a:t>Second level</a:t>
+            </a:r>
+          </a:p>
+          <a:p>
+            <a:pPr lvl="2"/>
+            <a:r>
+              <a:rPr lang="en-US"/>
+              <a:t>Third level</a:t>
+            </a:r>
+          </a:p>
+          <a:p>
+            <a:pPr lvl="3"/>
+            <a:r>
+              <a:rPr lang="en-US"/>
+              <a:t>Fourth level</a:t>
+            </a:r>
+          </a:p>
+          <a:p>
+            <a:pPr lvl="4"/>
+            <a:r>
+              <a:rPr lang="en-US"/>
+              <a:t>Fifth level</a:t>
+            </a:r>
+          </a:p>
+        </p:txBody>
+      </p:sp>
+      <p:sp>
+        <p:nvSpPr>
+          <p:cNvPr id="4" name="Date Placeholder 3"/>
+          <p:cNvSpPr>
+            <a:spLocks noGrp="1"/>
+          </p:cNvSpPr>
+          <p:nvPr>
+            <p:ph idx="2" sz="half" type="dt"/>
           </p:nvPr>
         </p:nvSpPr>
         <p:spPr>
           <a:xfrm>
-            <a:off x="1451579" y="2015732"/>
-            <a:ext cx="9603275" cy="3450613"/>
+            <a:off x="457200" y="4767263"/>
+            <a:ext cx="2133600" cy="273844"/>
           </a:xfrm>
           <a:prstGeom prst="rect">
             <a:avLst/>
           </a:prstGeom>
         </p:spPr>
         <p:txBody>
-          <a:bodyPr bIns="45720" lIns="91440" rIns="91440" rtlCol="0" tIns="45720" vert="horz">
-            <a:normAutofit/>
-          </a:bodyPr>
-          <a:lstStyle/>
-          <a:p>
-            <a:pPr lvl="0"/>
-            <a:r>
-              <a:rPr altLang="en-US" lang="ja-JP"/>
-              <a:t>マスター テキストの書式設定</a:t>
-            </a:r>
-          </a:p>
-          <a:p>
-            <a:pPr lvl="1"/>
-            <a:r>
-              <a:rPr altLang="en-US" lang="ja-JP"/>
-              <a:t>第 </a:t>
-            </a:r>
-            <a:r>
-              <a:rPr altLang="ja-JP" lang="en-US"/>
-              <a:t>2 </a:t>
-            </a:r>
-            <a:r>
-              <a:rPr altLang="en-US" lang="ja-JP"/>
-              <a:t>レベル</a:t>
-            </a:r>
-          </a:p>
-          <a:p>
-            <a:pPr lvl="2"/>
-            <a:r>
-              <a:rPr altLang="en-US" lang="ja-JP"/>
-              <a:t>第 </a:t>
-            </a:r>
-            <a:r>
-              <a:rPr altLang="ja-JP" lang="en-US"/>
-              <a:t>3 </a:t>
-            </a:r>
-            <a:r>
-              <a:rPr altLang="en-US" lang="ja-JP"/>
-              <a:t>レベル</a:t>
-            </a:r>
-          </a:p>
-          <a:p>
-            <a:pPr lvl="3"/>
-            <a:r>
-              <a:rPr altLang="en-US" lang="ja-JP"/>
-              <a:t>第 </a:t>
-            </a:r>
-            <a:r>
-              <a:rPr altLang="ja-JP" lang="en-US"/>
-              <a:t>4 </a:t>
-            </a:r>
-            <a:r>
-              <a:rPr altLang="en-US" lang="ja-JP"/>
-              <a:t>レベル</a:t>
-            </a:r>
-          </a:p>
-          <a:p>
-            <a:pPr lvl="4"/>
-            <a:r>
-              <a:rPr altLang="en-US" lang="ja-JP"/>
-              <a:t>第 </a:t>
-            </a:r>
-            <a:r>
-              <a:rPr altLang="ja-JP" lang="en-US"/>
-              <a:t>5 </a:t>
-            </a:r>
-            <a:r>
-              <a:rPr altLang="en-US" lang="ja-JP"/>
-              <a:t>レベル</a:t>
-            </a:r>
-            <a:endParaRPr dirty="0" lang="en-US"/>
-          </a:p>
-        </p:txBody>
-      </p:sp>
-      <p:sp>
-        <p:nvSpPr>
-          <p:cNvPr id="4" name="Date Placeholder 3"/>
-          <p:cNvSpPr>
-            <a:spLocks noGrp="1"/>
-          </p:cNvSpPr>
-          <p:nvPr>
-            <p:ph idx="2" sz="half" type="dt"/>
-          </p:nvPr>
-        </p:nvSpPr>
-        <p:spPr>
-          <a:xfrm>
-            <a:off x="7554138" y="330370"/>
-            <a:ext cx="3500715" cy="309201"/>
-          </a:xfrm>
-          <a:prstGeom prst="rect">
-            <a:avLst/>
-          </a:prstGeom>
-        </p:spPr>
-        <p:txBody>
           <a:bodyPr anchor="ctr" bIns="45720" lIns="91440" rIns="91440" rtlCol="0" tIns="45720" vert="horz"/>
           <a:lstStyle>
-            <a:lvl1pPr algn="r">
-              <a:defRPr sz="1000">
+            <a:lvl1pPr algn="l">
+              <a:defRPr sz="900">
                 <a:solidFill>
                   <a:schemeClr val="tx1">
                     <a:tint val="75000"/>
@@ -3342,12 +2718,11 @@
             </a:lvl1pPr>
           </a:lstStyle>
           <a:p>
-            <a:fld id="{48A87A34-81AB-432B-8DAE-1953F412C126}" type="datetimeFigureOut">
-              <a:rPr dirty="0" lang="en-US"/>
-              <a:pPr/>
-              <a:t>3/26/26</a:t>
+            <a:fld id="{241EB5C9-1307-BA42-ABA2-0BC069CD8E7F}" type="datetimeFigureOut">
+              <a:rPr lang="en-US" smtClean="0"/>
+              <a:t>1/2/22</a:t>
             </a:fld>
-            <a:endParaRPr dirty="0" lang="en-US"/>
+            <a:endParaRPr lang="en-US"/>
           </a:p>
         </p:txBody>
       </p:sp>
@@ -3363,8 +2738,8 @@
         </p:nvSpPr>
         <p:spPr>
           <a:xfrm>
-            <a:off x="1451579" y="329307"/>
-            <a:ext cx="5938836" cy="309201"/>
+            <a:off x="3124200" y="4767263"/>
+            <a:ext cx="2895600" cy="273844"/>
           </a:xfrm>
           <a:prstGeom prst="rect">
             <a:avLst/>
@@ -3373,8 +2748,8 @@
         <p:txBody>
           <a:bodyPr anchor="ctr" bIns="45720" lIns="91440" rIns="91440" rtlCol="0" tIns="45720" vert="horz"/>
           <a:lstStyle>
-            <a:lvl1pPr algn="l">
-              <a:defRPr sz="1000">
+            <a:lvl1pPr algn="ctr">
+              <a:defRPr sz="900">
                 <a:solidFill>
                   <a:schemeClr val="tx1">
                     <a:tint val="75000"/>
@@ -3384,7 +2759,7 @@
             </a:lvl1pPr>
           </a:lstStyle>
           <a:p>
-            <a:endParaRPr dirty="0" lang="en-US"/>
+            <a:endParaRPr lang="en-US"/>
           </a:p>
         </p:txBody>
       </p:sp>
@@ -3400,72 +2775,41 @@
         </p:nvSpPr>
         <p:spPr>
           <a:xfrm>
-            <a:off x="480060" y="798973"/>
-            <a:ext cx="811019" cy="503578"/>
+            <a:off x="6553200" y="4767263"/>
+            <a:ext cx="2133600" cy="273844"/>
           </a:xfrm>
           <a:prstGeom prst="rect">
             <a:avLst/>
           </a:prstGeom>
         </p:spPr>
         <p:txBody>
-          <a:bodyPr anchor="t" bIns="45720" lIns="91440" rIns="91440" rtlCol="0" tIns="45720" vert="horz"/>
+          <a:bodyPr anchor="ctr" bIns="45720" lIns="91440" rIns="91440" rtlCol="0" tIns="45720" vert="horz"/>
           <a:lstStyle>
             <a:lvl1pPr algn="r">
-              <a:defRPr sz="2800">
+              <a:defRPr sz="900">
                 <a:solidFill>
-                  <a:schemeClr val="accent1"/>
+                  <a:schemeClr val="tx1">
+                    <a:tint val="75000"/>
+                  </a:schemeClr>
                 </a:solidFill>
               </a:defRPr>
             </a:lvl1pPr>
           </a:lstStyle>
           <a:p>
-            <a:fld id="{6D22F896-40B5-4ADD-8801-0D06FADFA095}" type="slidenum">
-              <a:rPr dirty="0" lang="en-US"/>
-              <a:pPr/>
+            <a:fld id="{C5EF2332-01BF-834F-8236-50238282D533}" type="slidenum">
+              <a:rPr lang="en-US" smtClean="0"/>
               <a:t>‹#›</a:t>
             </a:fld>
-            <a:endParaRPr dirty="0" lang="en-US"/>
-          </a:p>
-        </p:txBody>
-      </p:sp>
-      <p:cxnSp>
-        <p:nvCxnSpPr>
-          <p:cNvPr id="10" name="Straight Connector 9"/>
-          <p:cNvCxnSpPr/>
-          <p:nvPr/>
-        </p:nvCxnSpPr>
-        <p:spPr>
-          <a:xfrm>
-            <a:off x="0" y="6128413"/>
-            <a:ext cx="12192000" cy="0"/>
-          </a:xfrm>
-          <a:prstGeom prst="line">
-            <a:avLst/>
-          </a:prstGeom>
-          <a:ln w="12700">
-            <a:solidFill>
-              <a:srgbClr val="000001">
-                <a:alpha val="20000"/>
-              </a:srgbClr>
-            </a:solidFill>
-          </a:ln>
-        </p:spPr>
-        <p:style>
-          <a:lnRef idx="1">
-            <a:schemeClr val="accent1"/>
-          </a:lnRef>
-          <a:fillRef idx="0">
-            <a:schemeClr val="accent1"/>
-          </a:fillRef>
-          <a:effectRef idx="0">
-            <a:schemeClr val="accent1"/>
-          </a:effectRef>
-          <a:fontRef idx="minor">
-            <a:schemeClr val="tx1"/>
-          </a:fontRef>
-        </p:style>
-      </p:cxnSp>
+            <a:endParaRPr lang="en-US"/>
+          </a:p>
+        </p:txBody>
+      </p:sp>
     </p:spTree>
+    <p:extLst>
+      <p:ext uri="{BB962C8B-B14F-4D97-AF65-F5344CB8AC3E}">
+        <p14:creationId xmlns:p14="http://schemas.microsoft.com/office/powerpoint/2010/main" val="3676200875"/>
+      </p:ext>
+    </p:extLst>
   </p:cSld>
   <p:clrMap accent1="accent1" accent2="accent2" accent3="accent3" accent4="accent4" accent5="accent5" accent6="accent6" bg1="lt1" bg2="lt2" folHlink="folHlink" hlink="hlink" tx1="dk1" tx2="dk2"/>
   <p:sldLayoutIdLst>
@@ -3483,19 +2827,15 @@
   </p:sldLayoutIdLst>
   <p:txStyles>
     <p:titleStyle>
-      <a:lvl1pPr algn="l" defTabSz="914400" eaLnBrk="1" hangingPunct="1" latinLnBrk="0" rtl="0">
-        <a:lnSpc>
-          <a:spcPct val="90000"/>
-        </a:lnSpc>
+      <a:lvl1pPr algn="ctr" defTabSz="342900" eaLnBrk="1" hangingPunct="1" latinLnBrk="0" rtl="0">
         <a:spcBef>
           <a:spcPct val="0"/>
         </a:spcBef>
         <a:buNone/>
-        <a:defRPr b="0" cap="all" i="0" kern="1200" kumimoji="1" sz="3200">
+        <a:defRPr kern="1200" sz="3300">
           <a:solidFill>
             <a:schemeClr val="tx1"/>
           </a:solidFill>
-          <a:effectLst/>
           <a:latin typeface="+mj-lt"/>
           <a:ea typeface="+mj-ea"/>
           <a:cs typeface="+mj-cs"/>
@@ -3503,208 +2843,136 @@
       </a:lvl1pPr>
     </p:titleStyle>
     <p:bodyStyle>
-      <a:lvl1pPr algn="l" defTabSz="914400" eaLnBrk="1" hangingPunct="1" indent="-228600" latinLnBrk="0" marL="228600" rtl="0">
-        <a:lnSpc>
-          <a:spcPct val="120000"/>
-        </a:lnSpc>
+      <a:lvl1pPr algn="l" defTabSz="342900" eaLnBrk="1" hangingPunct="1" indent="-342900" latinLnBrk="0" marL="342900" rtl="0">
         <a:spcBef>
-          <a:spcPts val="1000"/>
+          <a:spcPct val="20000"/>
         </a:spcBef>
-        <a:buClr>
-          <a:schemeClr val="accent1"/>
-        </a:buClr>
-        <a:buSzPct val="100000"/>
-        <a:buFont charset="0" panose="020B0604020202020204" pitchFamily="34" typeface="Arial"/>
+        <a:buFont typeface="Arial"/>
         <a:buChar char="•"/>
-        <a:defRPr kern="1200" kumimoji="1" sz="2000">
+        <a:defRPr kern="1200" sz="2400">
           <a:solidFill>
             <a:schemeClr val="tx1"/>
           </a:solidFill>
-          <a:effectLst/>
           <a:latin typeface="+mn-lt"/>
           <a:ea typeface="+mn-ea"/>
           <a:cs typeface="+mn-cs"/>
         </a:defRPr>
       </a:lvl1pPr>
-      <a:lvl2pPr algn="l" defTabSz="914400" eaLnBrk="1" hangingPunct="1" indent="-228600" latinLnBrk="0" marL="685800" rtl="0">
-        <a:lnSpc>
-          <a:spcPct val="120000"/>
-        </a:lnSpc>
+      <a:lvl2pPr algn="l" defTabSz="342900" eaLnBrk="1" hangingPunct="1" indent="-342900" latinLnBrk="0" marL="685800" rtl="0">
         <a:spcBef>
-          <a:spcPts val="500"/>
+          <a:spcPct val="20000"/>
         </a:spcBef>
-        <a:buClr>
-          <a:schemeClr val="accent1"/>
-        </a:buClr>
-        <a:buSzPct val="100000"/>
-        <a:buFont charset="0" panose="020B0604020202020204" pitchFamily="34" typeface="Arial"/>
-        <a:buChar char="•"/>
-        <a:defRPr baseline="0" cap="none" kern="1200" kumimoji="1" sz="1800">
+        <a:buFont typeface="Arial"/>
+        <a:buChar char="–"/>
+        <a:defRPr kern="1200" sz="2100">
           <a:solidFill>
             <a:schemeClr val="tx1"/>
           </a:solidFill>
-          <a:effectLst/>
           <a:latin typeface="+mn-lt"/>
           <a:ea typeface="+mn-ea"/>
           <a:cs typeface="+mn-cs"/>
         </a:defRPr>
       </a:lvl2pPr>
-      <a:lvl3pPr algn="l" defTabSz="914400" eaLnBrk="1" hangingPunct="1" indent="-228600" latinLnBrk="0" marL="1143000" rtl="0">
-        <a:lnSpc>
-          <a:spcPct val="120000"/>
-        </a:lnSpc>
+      <a:lvl3pPr algn="l" defTabSz="342900" eaLnBrk="1" hangingPunct="1" indent="-342900" latinLnBrk="0" marL="1028700" rtl="0">
         <a:spcBef>
-          <a:spcPts val="500"/>
+          <a:spcPct val="20000"/>
         </a:spcBef>
-        <a:buClr>
-          <a:schemeClr val="accent1"/>
-        </a:buClr>
-        <a:buSzPct val="100000"/>
-        <a:buFont charset="0" panose="020B0604020202020204" pitchFamily="34" typeface="Arial"/>
+        <a:buFont typeface="Arial"/>
         <a:buChar char="•"/>
-        <a:defRPr kern="1200" kumimoji="1" sz="1600">
+        <a:defRPr kern="1200" sz="1800">
           <a:solidFill>
             <a:schemeClr val="tx1"/>
           </a:solidFill>
-          <a:effectLst/>
           <a:latin typeface="+mn-lt"/>
           <a:ea typeface="+mn-ea"/>
           <a:cs typeface="+mn-cs"/>
         </a:defRPr>
       </a:lvl3pPr>
-      <a:lvl4pPr algn="l" defTabSz="914400" eaLnBrk="1" hangingPunct="1" indent="-228600" latinLnBrk="0" marL="1600200" rtl="0">
-        <a:lnSpc>
-          <a:spcPct val="120000"/>
-        </a:lnSpc>
+      <a:lvl4pPr algn="l" defTabSz="342900" eaLnBrk="1" hangingPunct="1" indent="-342900" latinLnBrk="0" marL="1371600" rtl="0">
         <a:spcBef>
-          <a:spcPts val="500"/>
+          <a:spcPct val="20000"/>
         </a:spcBef>
-        <a:buClr>
-          <a:schemeClr val="accent1"/>
-        </a:buClr>
-        <a:buSzPct val="100000"/>
-        <a:buFont charset="0" panose="020B0604020202020204" pitchFamily="34" typeface="Arial"/>
-        <a:buChar char="•"/>
-        <a:defRPr baseline="0" cap="none" kern="1200" kumimoji="1" sz="1400">
+        <a:buFont typeface="Arial"/>
+        <a:buChar char="–"/>
+        <a:defRPr kern="1200" sz="1500">
           <a:solidFill>
             <a:schemeClr val="tx1"/>
           </a:solidFill>
-          <a:effectLst/>
           <a:latin typeface="+mn-lt"/>
           <a:ea typeface="+mn-ea"/>
           <a:cs typeface="+mn-cs"/>
         </a:defRPr>
       </a:lvl4pPr>
-      <a:lvl5pPr algn="l" defTabSz="914400" eaLnBrk="1" hangingPunct="1" indent="-228600" latinLnBrk="0" marL="2057400" rtl="0">
-        <a:lnSpc>
-          <a:spcPct val="120000"/>
-        </a:lnSpc>
+      <a:lvl5pPr algn="l" defTabSz="342900" eaLnBrk="1" hangingPunct="1" indent="-342900" latinLnBrk="0" marL="1714500" rtl="0">
         <a:spcBef>
-          <a:spcPts val="500"/>
+          <a:spcPct val="20000"/>
         </a:spcBef>
-        <a:buClr>
-          <a:schemeClr val="accent1"/>
-        </a:buClr>
-        <a:buSzPct val="100000"/>
-        <a:buFont charset="0" panose="020B0604020202020204" pitchFamily="34" typeface="Arial"/>
-        <a:buChar char="•"/>
-        <a:defRPr kern="1200" kumimoji="1" sz="1200">
+        <a:buFont typeface="Arial"/>
+        <a:buChar char="»"/>
+        <a:defRPr kern="1200" sz="1500">
           <a:solidFill>
             <a:schemeClr val="tx1"/>
           </a:solidFill>
-          <a:effectLst/>
           <a:latin typeface="+mn-lt"/>
           <a:ea typeface="+mn-ea"/>
           <a:cs typeface="+mn-cs"/>
         </a:defRPr>
       </a:lvl5pPr>
-      <a:lvl6pPr algn="l" defTabSz="914400" eaLnBrk="1" hangingPunct="1" indent="-228600" latinLnBrk="0" marL="2514600" rtl="0">
-        <a:lnSpc>
-          <a:spcPct val="120000"/>
-        </a:lnSpc>
+      <a:lvl6pPr algn="l" defTabSz="342900" eaLnBrk="1" hangingPunct="1" indent="-342900" latinLnBrk="0" marL="2057400" rtl="0">
         <a:spcBef>
-          <a:spcPts val="500"/>
+          <a:spcPct val="20000"/>
         </a:spcBef>
-        <a:buClr>
-          <a:schemeClr val="accent1"/>
-        </a:buClr>
-        <a:buSzPct val="100000"/>
-        <a:buFont charset="0" panose="020B0604020202020204" pitchFamily="34" typeface="Arial"/>
+        <a:buFont typeface="Arial"/>
         <a:buChar char="•"/>
-        <a:defRPr kern="1200" kumimoji="1" sz="1200">
+        <a:defRPr kern="1200" sz="1500">
           <a:solidFill>
             <a:schemeClr val="tx1"/>
           </a:solidFill>
-          <a:effectLst/>
           <a:latin typeface="+mn-lt"/>
           <a:ea typeface="+mn-ea"/>
           <a:cs typeface="+mn-cs"/>
         </a:defRPr>
       </a:lvl6pPr>
-      <a:lvl7pPr algn="l" defTabSz="914400" eaLnBrk="1" hangingPunct="1" indent="-228600" latinLnBrk="0" marL="2971800" rtl="0">
-        <a:lnSpc>
-          <a:spcPct val="120000"/>
-        </a:lnSpc>
+      <a:lvl7pPr algn="l" defTabSz="342900" eaLnBrk="1" hangingPunct="1" indent="-342900" latinLnBrk="0" marL="2400300" rtl="0">
         <a:spcBef>
-          <a:spcPts val="500"/>
+          <a:spcPct val="20000"/>
         </a:spcBef>
-        <a:buClr>
-          <a:schemeClr val="accent1"/>
-        </a:buClr>
-        <a:buSzPct val="100000"/>
-        <a:buFont charset="0" panose="020B0604020202020204" pitchFamily="34" typeface="Arial"/>
+        <a:buFont typeface="Arial"/>
         <a:buChar char="•"/>
-        <a:defRPr kern="1200" kumimoji="1" sz="1200">
+        <a:defRPr kern="1200" sz="1500">
           <a:solidFill>
             <a:schemeClr val="tx1"/>
           </a:solidFill>
-          <a:effectLst/>
           <a:latin typeface="+mn-lt"/>
           <a:ea typeface="+mn-ea"/>
           <a:cs typeface="+mn-cs"/>
         </a:defRPr>
       </a:lvl7pPr>
-      <a:lvl8pPr algn="l" defTabSz="914400" eaLnBrk="1" hangingPunct="1" indent="-228600" latinLnBrk="0" marL="3429000" rtl="0">
-        <a:lnSpc>
-          <a:spcPct val="120000"/>
-        </a:lnSpc>
+      <a:lvl8pPr algn="l" defTabSz="342900" eaLnBrk="1" hangingPunct="1" indent="-342900" latinLnBrk="0" marL="2743200" rtl="0">
         <a:spcBef>
-          <a:spcPts val="500"/>
+          <a:spcPct val="20000"/>
         </a:spcBef>
-        <a:buClr>
-          <a:schemeClr val="accent1"/>
-        </a:buClr>
-        <a:buSzPct val="100000"/>
-        <a:buFont charset="0" panose="020B0604020202020204" pitchFamily="34" typeface="Arial"/>
+        <a:buFont typeface="Arial"/>
         <a:buChar char="•"/>
-        <a:defRPr baseline="0" kern="1200" kumimoji="1" sz="1200">
+        <a:defRPr kern="1200" sz="1500">
           <a:solidFill>
             <a:schemeClr val="tx1"/>
           </a:solidFill>
-          <a:effectLst/>
           <a:latin typeface="+mn-lt"/>
           <a:ea typeface="+mn-ea"/>
           <a:cs typeface="+mn-cs"/>
         </a:defRPr>
       </a:lvl8pPr>
-      <a:lvl9pPr algn="l" defTabSz="914400" eaLnBrk="1" hangingPunct="1" indent="-228600" latinLnBrk="0" marL="3886200" rtl="0">
-        <a:lnSpc>
-          <a:spcPct val="120000"/>
-        </a:lnSpc>
+      <a:lvl9pPr algn="l" defTabSz="342900" eaLnBrk="1" hangingPunct="1" indent="-342900" latinLnBrk="0" marL="3086100" rtl="0">
         <a:spcBef>
-          <a:spcPts val="500"/>
+          <a:spcPct val="20000"/>
         </a:spcBef>
-        <a:buClr>
-          <a:schemeClr val="accent1"/>
-        </a:buClr>
-        <a:buSzPct val="100000"/>
-        <a:buFont charset="0" panose="020B0604020202020204" pitchFamily="34" typeface="Arial"/>
+        <a:buFont typeface="Arial"/>
         <a:buChar char="•"/>
-        <a:defRPr baseline="0" kern="1200" kumimoji="1" sz="1200">
+        <a:defRPr kern="1200" sz="1500">
           <a:solidFill>
             <a:schemeClr val="tx1"/>
           </a:solidFill>
-          <a:effectLst/>
           <a:latin typeface="+mn-lt"/>
           <a:ea typeface="+mn-ea"/>
           <a:cs typeface="+mn-cs"/>
@@ -3715,8 +2983,8 @@
       <a:defPPr>
         <a:defRPr lang="en-US"/>
       </a:defPPr>
-      <a:lvl1pPr algn="l" defTabSz="914400" eaLnBrk="1" hangingPunct="1" latinLnBrk="0" marL="0" rtl="0">
-        <a:defRPr kern="1200" kumimoji="1" sz="1800">
+      <a:lvl1pPr algn="l" defTabSz="342900" eaLnBrk="1" hangingPunct="1" latinLnBrk="0" marL="0" rtl="0">
+        <a:defRPr kern="1200" sz="1350">
           <a:solidFill>
             <a:schemeClr val="tx1"/>
           </a:solidFill>
@@ -3725,8 +2993,8 @@
           <a:cs typeface="+mn-cs"/>
         </a:defRPr>
       </a:lvl1pPr>
-      <a:lvl2pPr algn="l" defTabSz="914400" eaLnBrk="1" hangingPunct="1" latinLnBrk="0" marL="457200" rtl="0">
-        <a:defRPr kern="1200" kumimoji="1" sz="1800">
+      <a:lvl2pPr algn="l" defTabSz="342900" eaLnBrk="1" hangingPunct="1" latinLnBrk="0" marL="342900" rtl="0">
+        <a:defRPr kern="1200" sz="1350">
           <a:solidFill>
             <a:schemeClr val="tx1"/>
           </a:solidFill>
@@ -3735,8 +3003,8 @@
           <a:cs typeface="+mn-cs"/>
         </a:defRPr>
       </a:lvl2pPr>
-      <a:lvl3pPr algn="l" defTabSz="914400" eaLnBrk="1" hangingPunct="1" latinLnBrk="0" marL="914400" rtl="0">
-        <a:defRPr kern="1200" kumimoji="1" sz="1800">
+      <a:lvl3pPr algn="l" defTabSz="342900" eaLnBrk="1" hangingPunct="1" latinLnBrk="0" marL="685800" rtl="0">
+        <a:defRPr kern="1200" sz="1350">
           <a:solidFill>
             <a:schemeClr val="tx1"/>
           </a:solidFill>
@@ -3745,8 +3013,8 @@
           <a:cs typeface="+mn-cs"/>
         </a:defRPr>
       </a:lvl3pPr>
-      <a:lvl4pPr algn="l" defTabSz="914400" eaLnBrk="1" hangingPunct="1" latinLnBrk="0" marL="1371600" rtl="0">
-        <a:defRPr kern="1200" kumimoji="1" sz="1800">
+      <a:lvl4pPr algn="l" defTabSz="342900" eaLnBrk="1" hangingPunct="1" latinLnBrk="0" marL="1028700" rtl="0">
+        <a:defRPr kern="1200" sz="1350">
           <a:solidFill>
             <a:schemeClr val="tx1"/>
           </a:solidFill>
@@ -3755,8 +3023,8 @@
           <a:cs typeface="+mn-cs"/>
         </a:defRPr>
       </a:lvl4pPr>
-      <a:lvl5pPr algn="l" defTabSz="914400" eaLnBrk="1" hangingPunct="1" latinLnBrk="0" marL="1828800" rtl="0">
-        <a:defRPr kern="1200" kumimoji="1" sz="1800">
+      <a:lvl5pPr algn="l" defTabSz="342900" eaLnBrk="1" hangingPunct="1" latinLnBrk="0" marL="1371600" rtl="0">
+        <a:defRPr kern="1200" sz="1350">
           <a:solidFill>
             <a:schemeClr val="tx1"/>
           </a:solidFill>
@@ -3765,8 +3033,8 @@
           <a:cs typeface="+mn-cs"/>
         </a:defRPr>
       </a:lvl5pPr>
-      <a:lvl6pPr algn="l" defTabSz="914400" eaLnBrk="1" hangingPunct="1" latinLnBrk="0" marL="2286000" rtl="0">
-        <a:defRPr kern="1200" kumimoji="1" sz="1800">
+      <a:lvl6pPr algn="l" defTabSz="342900" eaLnBrk="1" hangingPunct="1" latinLnBrk="0" marL="1714500" rtl="0">
+        <a:defRPr kern="1200" sz="1350">
           <a:solidFill>
             <a:schemeClr val="tx1"/>
           </a:solidFill>
@@ -3775,8 +3043,8 @@
           <a:cs typeface="+mn-cs"/>
         </a:defRPr>
       </a:lvl6pPr>
-      <a:lvl7pPr algn="l" defTabSz="914400" eaLnBrk="1" hangingPunct="1" latinLnBrk="0" marL="2743200" rtl="0">
-        <a:defRPr kern="1200" kumimoji="1" sz="1800">
+      <a:lvl7pPr algn="l" defTabSz="342900" eaLnBrk="1" hangingPunct="1" latinLnBrk="0" marL="2057400" rtl="0">
+        <a:defRPr kern="1200" sz="1350">
           <a:solidFill>
             <a:schemeClr val="tx1"/>
           </a:solidFill>
@@ -3785,8 +3053,8 @@
           <a:cs typeface="+mn-cs"/>
         </a:defRPr>
       </a:lvl7pPr>
-      <a:lvl8pPr algn="l" defTabSz="914400" eaLnBrk="1" hangingPunct="1" latinLnBrk="0" marL="3200400" rtl="0">
-        <a:defRPr kern="1200" kumimoji="1" sz="1800">
+      <a:lvl8pPr algn="l" defTabSz="342900" eaLnBrk="1" hangingPunct="1" latinLnBrk="0" marL="2400300" rtl="0">
+        <a:defRPr kern="1200" sz="1350">
           <a:solidFill>
             <a:schemeClr val="tx1"/>
           </a:solidFill>
@@ -3795,8 +3063,8 @@
           <a:cs typeface="+mn-cs"/>
         </a:defRPr>
       </a:lvl8pPr>
-      <a:lvl9pPr algn="l" defTabSz="914400" eaLnBrk="1" hangingPunct="1" latinLnBrk="0" marL="3657600" rtl="0">
-        <a:defRPr kern="1200" kumimoji="1" sz="1800">
+      <a:lvl9pPr algn="l" defTabSz="342900" eaLnBrk="1" hangingPunct="1" latinLnBrk="0" marL="2743200" rtl="0">
+        <a:defRPr kern="1200" sz="1350">
           <a:solidFill>
             <a:schemeClr val="tx1"/>
           </a:solidFill>
@@ -3839,8 +3107,8 @@
         </p:nvSpPr>
         <p:spPr>
           <a:xfrm>
-            <a:off x="2417779" y="802298"/>
-            <a:ext cx="8637073" cy="2541431"/>
+            <a:off x="685800" y="1597819"/>
+            <a:ext cx="7772400" cy="1102519"/>
           </a:xfrm>
         </p:spPr>
         <p:txBody>
@@ -4283,9 +3551,9 @@
 </file>
 
 <file path=ppt/theme/theme1.xml><?xml version="1.0" encoding="utf-8"?>
-<a:theme xmlns:a="http://schemas.openxmlformats.org/drawingml/2006/main" name="ギャラリー">
+<a:theme xmlns:a="http://schemas.openxmlformats.org/drawingml/2006/main" name="Office Theme">
   <a:themeElements>
-    <a:clrScheme name="Gallery">
+    <a:clrScheme name="Office">
       <a:dk1>
         <a:sysClr val="windowText" lastClr="000000"/>
       </a:dk1>
@@ -4293,44 +3561,44 @@
         <a:sysClr val="window" lastClr="FFFFFF"/>
       </a:lt1>
       <a:dk2>
-        <a:srgbClr val="454545"/>
+        <a:srgbClr val="1F497D"/>
       </a:dk2>
       <a:lt2>
-        <a:srgbClr val="DFDBD5"/>
+        <a:srgbClr val="EEECE1"/>
       </a:lt2>
       <a:accent1>
-        <a:srgbClr val="B71E42"/>
+        <a:srgbClr val="4F81BD"/>
       </a:accent1>
       <a:accent2>
-        <a:srgbClr val="DE478E"/>
+        <a:srgbClr val="C0504D"/>
       </a:accent2>
       <a:accent3>
-        <a:srgbClr val="BC72F0"/>
+        <a:srgbClr val="9BBB59"/>
       </a:accent3>
       <a:accent4>
-        <a:srgbClr val="795FAF"/>
+        <a:srgbClr val="8064A2"/>
       </a:accent4>
       <a:accent5>
-        <a:srgbClr val="586EA6"/>
+        <a:srgbClr val="4BACC6"/>
       </a:accent5>
       <a:accent6>
-        <a:srgbClr val="6892A0"/>
+        <a:srgbClr val="F79646"/>
       </a:accent6>
       <a:hlink>
-        <a:srgbClr val="FA2B5C"/>
+        <a:srgbClr val="0000FF"/>
       </a:hlink>
       <a:folHlink>
-        <a:srgbClr val="BC658E"/>
+        <a:srgbClr val="800080"/>
       </a:folHlink>
     </a:clrScheme>
-    <a:fontScheme name="Gallery">
+    <a:fontScheme name="Office">
       <a:majorFont>
-        <a:latin typeface="Gill Sans MT" panose="020B0502020104020203"/>
+        <a:latin typeface="Calibri"/>
         <a:ea typeface=""/>
         <a:cs typeface=""/>
-        <a:font script="Jpan" typeface="游ゴシック Light"/>
+        <a:font script="Jpan" typeface="ＭＳ Ｐゴシック"/>
         <a:font script="Hang" typeface="맑은 고딕"/>
-        <a:font script="Hans" typeface="等线 Light"/>
+        <a:font script="Hans" typeface="宋体"/>
         <a:font script="Hant" typeface="新細明體"/>
         <a:font script="Arab" typeface="Times New Roman"/>
         <a:font script="Hebr" typeface="Times New Roman"/>
@@ -4360,12 +3628,12 @@
         <a:font script="Geor" typeface="Sylfaen"/>
       </a:majorFont>
       <a:minorFont>
-        <a:latin typeface="Gill Sans MT" panose="020B0502020104020203"/>
+        <a:latin typeface="Calibri"/>
         <a:ea typeface=""/>
         <a:cs typeface=""/>
-        <a:font script="Jpan" typeface="游ゴシック"/>
+        <a:font script="Jpan" typeface="ＭＳ Ｐゴシック"/>
         <a:font script="Hang" typeface="맑은 고딕"/>
-        <a:font script="Hans" typeface="等线"/>
+        <a:font script="Hans" typeface="宋体"/>
         <a:font script="Hant" typeface="新細明體"/>
         <a:font script="Arab" typeface="Arial"/>
         <a:font script="Hebr" typeface="Arial"/>
@@ -4395,7 +3663,7 @@
         <a:font script="Geor" typeface="Sylfaen"/>
       </a:minorFont>
     </a:fontScheme>
-    <a:fmtScheme name="Gallery">
+    <a:fmtScheme name="Office">
       <a:fillStyleLst>
         <a:solidFill>
           <a:schemeClr val="phClr"/>
@@ -4404,64 +3672,62 @@
           <a:gsLst>
             <a:gs pos="0">
               <a:schemeClr val="phClr">
-                <a:tint val="54000"/>
-                <a:alpha val="100000"/>
-                <a:satMod val="105000"/>
-                <a:lumMod val="110000"/>
+                <a:tint val="50000"/>
+                <a:satMod val="300000"/>
+              </a:schemeClr>
+            </a:gs>
+            <a:gs pos="35000">
+              <a:schemeClr val="phClr">
+                <a:tint val="37000"/>
+                <a:satMod val="300000"/>
               </a:schemeClr>
             </a:gs>
             <a:gs pos="100000">
               <a:schemeClr val="phClr">
-                <a:tint val="78000"/>
-                <a:alpha val="92000"/>
-                <a:satMod val="109000"/>
-                <a:lumMod val="100000"/>
+                <a:tint val="15000"/>
+                <a:satMod val="350000"/>
               </a:schemeClr>
             </a:gs>
           </a:gsLst>
-          <a:lin ang="5400000" scaled="0"/>
+          <a:lin ang="16200000" scaled="1"/>
         </a:gradFill>
         <a:gradFill rotWithShape="1">
           <a:gsLst>
             <a:gs pos="0">
               <a:schemeClr val="phClr">
-                <a:tint val="98000"/>
-                <a:satMod val="110000"/>
-                <a:lumMod val="104000"/>
-              </a:schemeClr>
-            </a:gs>
-            <a:gs pos="69000">
-              <a:schemeClr val="phClr">
-                <a:shade val="88000"/>
+                <a:tint val="100000"/>
+                <a:shade val="100000"/>
                 <a:satMod val="130000"/>
-                <a:lumMod val="92000"/>
               </a:schemeClr>
             </a:gs>
             <a:gs pos="100000">
               <a:schemeClr val="phClr">
-                <a:shade val="78000"/>
-                <a:satMod val="130000"/>
-                <a:lumMod val="92000"/>
+                <a:tint val="50000"/>
+                <a:shade val="100000"/>
+                <a:satMod val="350000"/>
               </a:schemeClr>
             </a:gs>
           </a:gsLst>
-          <a:lin ang="5400000" scaled="0"/>
+          <a:lin ang="16200000" scaled="0"/>
         </a:gradFill>
       </a:fillStyleLst>
       <a:lnStyleLst>
         <a:ln w="9525" cap="flat" cmpd="sng" algn="ctr">
           <a:solidFill>
-            <a:schemeClr val="phClr"/>
+            <a:schemeClr val="phClr">
+              <a:shade val="95000"/>
+              <a:satMod val="105000"/>
+            </a:schemeClr>
           </a:solidFill>
           <a:prstDash val="solid"/>
         </a:ln>
-        <a:ln w="15875" cap="flat" cmpd="sng" algn="ctr">
+        <a:ln w="25400" cap="flat" cmpd="sng" algn="ctr">
           <a:solidFill>
             <a:schemeClr val="phClr"/>
           </a:solidFill>
           <a:prstDash val="solid"/>
         </a:ln>
-        <a:ln w="22225" cap="flat" cmpd="sng" algn="ctr">
+        <a:ln w="38100" cap="flat" cmpd="sng" algn="ctr">
           <a:solidFill>
             <a:schemeClr val="phClr"/>
           </a:solidFill>
@@ -4470,16 +3736,28 @@
       </a:lnStyleLst>
       <a:effectStyleLst>
         <a:effectStyle>
-          <a:effectLst/>
-        </a:effectStyle>
-        <a:effectStyle>
-          <a:effectLst/>
+          <a:effectLst>
+            <a:outerShdw blurRad="40000" dist="20000" dir="5400000" rotWithShape="0">
+              <a:srgbClr val="000000">
+                <a:alpha val="38000"/>
+              </a:srgbClr>
+            </a:outerShdw>
+          </a:effectLst>
         </a:effectStyle>
         <a:effectStyle>
           <a:effectLst>
-            <a:outerShdw blurRad="50800" dist="50800" dir="5400000" sx="96000" sy="96000" rotWithShape="0">
+            <a:outerShdw blurRad="40000" dist="23000" dir="5400000" rotWithShape="0">
               <a:srgbClr val="000000">
-                <a:alpha val="48000"/>
+                <a:alpha val="35000"/>
+              </a:srgbClr>
+            </a:outerShdw>
+          </a:effectLst>
+        </a:effectStyle>
+        <a:effectStyle>
+          <a:effectLst>
+            <a:outerShdw blurRad="40000" dist="23000" dir="5400000" rotWithShape="0">
+              <a:srgbClr val="000000">
+                <a:alpha val="35000"/>
               </a:srgbClr>
             </a:outerShdw>
           </a:effectLst>
@@ -4487,12 +3765,12 @@
             <a:camera prst="orthographicFront">
               <a:rot lat="0" lon="0" rev="0"/>
             </a:camera>
-            <a:lightRig rig="balanced" dir="t">
-              <a:rot lat="0" lon="0" rev="1080000"/>
+            <a:lightRig rig="threePt" dir="t">
+              <a:rot lat="0" lon="0" rev="1200000"/>
             </a:lightRig>
           </a:scene3d>
           <a:sp3d>
-            <a:bevelT w="38100" h="12700" prst="softRound"/>
+            <a:bevelT w="63500" h="25400"/>
           </a:sp3d>
         </a:effectStyle>
       </a:effectStyleLst>
@@ -4500,21 +3778,44 @@
         <a:solidFill>
           <a:schemeClr val="phClr"/>
         </a:solidFill>
-        <a:solidFill>
-          <a:schemeClr val="phClr"/>
-        </a:solidFill>
         <a:gradFill rotWithShape="1">
           <a:gsLst>
             <a:gs pos="0">
               <a:schemeClr val="phClr">
-                <a:tint val="94000"/>
-                <a:satMod val="80000"/>
-                <a:lumMod val="106000"/>
+                <a:tint val="40000"/>
+                <a:satMod val="350000"/>
+              </a:schemeClr>
+            </a:gs>
+            <a:gs pos="40000">
+              <a:schemeClr val="phClr">
+                <a:tint val="45000"/>
+                <a:shade val="99000"/>
+                <a:satMod val="350000"/>
               </a:schemeClr>
             </a:gs>
             <a:gs pos="100000">
               <a:schemeClr val="phClr">
-                <a:shade val="80000"/>
+                <a:shade val="20000"/>
+                <a:satMod val="255000"/>
+              </a:schemeClr>
+            </a:gs>
+          </a:gsLst>
+          <a:path path="circle">
+            <a:fillToRect l="50000" t="-80000" r="50000" b="180000"/>
+          </a:path>
+        </a:gradFill>
+        <a:gradFill rotWithShape="1">
+          <a:gsLst>
+            <a:gs pos="0">
+              <a:schemeClr val="phClr">
+                <a:tint val="80000"/>
+                <a:satMod val="300000"/>
+              </a:schemeClr>
+            </a:gs>
+            <a:gs pos="100000">
+              <a:schemeClr val="phClr">
+                <a:shade val="30000"/>
+                <a:satMod val="200000"/>
               </a:schemeClr>
             </a:gs>
           </a:gsLst>
@@ -4525,13 +3826,47 @@
       </a:bgFillStyleLst>
     </a:fmtScheme>
   </a:themeElements>
-  <a:objectDefaults/>
+  <a:objectDefaults>
+    <a:spDef>
+      <a:spPr/>
+      <a:bodyPr/>
+      <a:lstStyle/>
+      <a:style>
+        <a:lnRef idx="1">
+          <a:schemeClr val="accent1"/>
+        </a:lnRef>
+        <a:fillRef idx="3">
+          <a:schemeClr val="accent1"/>
+        </a:fillRef>
+        <a:effectRef idx="2">
+          <a:schemeClr val="accent1"/>
+        </a:effectRef>
+        <a:fontRef idx="minor">
+          <a:schemeClr val="lt1"/>
+        </a:fontRef>
+      </a:style>
+    </a:spDef>
+    <a:lnDef>
+      <a:spPr/>
+      <a:bodyPr/>
+      <a:lstStyle/>
+      <a:style>
+        <a:lnRef idx="2">
+          <a:schemeClr val="accent1"/>
+        </a:lnRef>
+        <a:fillRef idx="0">
+          <a:schemeClr val="accent1"/>
+        </a:fillRef>
+        <a:effectRef idx="1">
+          <a:schemeClr val="accent1"/>
+        </a:effectRef>
+        <a:fontRef idx="minor">
+          <a:schemeClr val="tx1"/>
+        </a:fontRef>
+      </a:style>
+    </a:lnDef>
+  </a:objectDefaults>
   <a:extraClrSchemeLst/>
-  <a:extLst>
-    <a:ext uri="{05A4C25C-085E-4340-85A3-A5531E510DB2}">
-      <thm15:themeFamily xmlns:thm15="http://schemas.microsoft.com/office/thememl/2012/main" name="Gallery" id="{BBFCD31E-59A1-489D-B089-A3EAD7CAE12E}" vid="{F5E91637-A7B6-4E27-B710-77DA7014EE1E}"/>
-    </a:ext>
-  </a:extLst>
 </a:theme>
 </file>
 
